--- a/tests/goldens/build-pptx/dark-text.pptx
+++ b/tests/goldens/build-pptx/dark-text.pptx
@@ -1,6 +1,6 @@
 
 <file path=ppt/presentation.xml><?xml version="1.0" encoding="utf-8"?>
-<p:presentation xmlns:a="http://schemas.openxmlformats.org/drawingml/2006/main" xmlns:r="http://schemas.openxmlformats.org/officeDocument/2006/relationships" xmlns:p="http://schemas.openxmlformats.org/presentationml/2006/main" embedTrueTypeFonts="1" autoCompressPictures="0">
+<p:presentation xmlns:p="http://schemas.openxmlformats.org/presentationml/2006/main" xmlns:r="http://schemas.openxmlformats.org/officeDocument/2006/relationships" xmlns:a="http://schemas.openxmlformats.org/drawingml/2006/main" xmlns:ns1="http://schemas.microsoft.com/office/powerpoint/2010/main" xmlns:ns2="http://schemas.microsoft.com/office/powerpoint/2012/main" embedTrueTypeFonts="1" autoCompressPictures="0">
   <p:sldMasterIdLst>
     <p:sldMasterId id="2147483662" r:id="rId1"/>
   </p:sldMasterIdLst>
@@ -155,236 +155,236 @@
   </p:defaultTextStyle>
   <p:extLst>
     <p:ext uri="{521415D9-36F7-43E2-AB2F-B90AF26B5E84}">
-      <p14:sectionLst xmlns:p14="http://schemas.microsoft.com/office/powerpoint/2010/main">
-        <p14:section name="General" id="{22CC9C37-6F57-1942-BCD8-73E087642CEC}">
-          <p14:sldIdLst>
-            <p14:sldId id="1468"/>
-          </p14:sldIdLst>
-        </p14:section>
-        <p14:section name="Элементы" id="{FCDB1E2F-1EC3-D34C-8BA2-4D02BF810EAE}">
-          <p14:sldIdLst>
-            <p14:sldId id="1463"/>
-            <p14:sldId id="1437"/>
-            <p14:sldId id="1438"/>
-            <p14:sldId id="1439"/>
-            <p14:sldId id="1440"/>
-            <p14:sldId id="1443"/>
-            <p14:sldId id="1444"/>
-            <p14:sldId id="272"/>
-            <p14:sldId id="1446"/>
-            <p14:sldId id="1447"/>
-            <p14:sldId id="1448"/>
-            <p14:sldId id="1449"/>
-            <p14:sldId id="1450"/>
-            <p14:sldId id="1451"/>
-            <p14:sldId id="1452"/>
-            <p14:sldId id="271"/>
-          </p14:sldIdLst>
-        </p14:section>
-        <p14:section name="Разделители" id="{BF1577A6-5926-2C42-87A6-8890D7536B01}">
-          <p14:sldIdLst>
-            <p14:sldId id="257"/>
-            <p14:sldId id="259"/>
-            <p14:sldId id="258"/>
-            <p14:sldId id="293"/>
-          </p14:sldIdLst>
-        </p14:section>
-        <p14:section name="Текст" id="{6FFE1352-8B79-DE43-8F36-010818B78429}">
-          <p14:sldIdLst>
-            <p14:sldId id="260"/>
-            <p14:sldId id="261"/>
-            <p14:sldId id="264"/>
-            <p14:sldId id="288"/>
-            <p14:sldId id="262"/>
-            <p14:sldId id="1462"/>
-            <p14:sldId id="1453"/>
-            <p14:sldId id="1459"/>
-            <p14:sldId id="318"/>
-            <p14:sldId id="319"/>
-          </p14:sldIdLst>
-        </p14:section>
-        <p14:section name="Фото" id="{965C53C9-F4B1-B949-8AFD-332C27ED0612}">
-          <p14:sldIdLst>
-            <p14:sldId id="304"/>
-            <p14:sldId id="305"/>
-            <p14:sldId id="310"/>
-            <p14:sldId id="309"/>
-            <p14:sldId id="311"/>
-            <p14:sldId id="312"/>
-            <p14:sldId id="313"/>
-            <p14:sldId id="1454"/>
-          </p14:sldIdLst>
-        </p14:section>
-        <p14:section name="Карточки" id="{04E5C437-E3D9-1746-B1BA-50115E54AB9B}">
-          <p14:sldIdLst>
-            <p14:sldId id="1455"/>
-            <p14:sldId id="1456"/>
-            <p14:sldId id="325"/>
-            <p14:sldId id="327"/>
-          </p14:sldIdLst>
-        </p14:section>
-        <p14:section name="Таблицы" id="{CEAA8852-9645-DE4D-9EE3-BD0DC8F120C6}">
-          <p14:sldIdLst>
-            <p14:sldId id="1465"/>
-            <p14:sldId id="1457"/>
-            <p14:sldId id="1458"/>
-          </p14:sldIdLst>
-        </p14:section>
-        <p14:section name="Графики" id="{07FA13C4-1ADD-1745-B469-DEBA7B660A99}">
-          <p14:sldIdLst>
-            <p14:sldId id="338"/>
-            <p14:sldId id="339"/>
-            <p14:sldId id="340"/>
-            <p14:sldId id="342"/>
-            <p14:sldId id="345"/>
-            <p14:sldId id="346"/>
-            <p14:sldId id="1466"/>
-            <p14:sldId id="1467"/>
-          </p14:sldIdLst>
-        </p14:section>
-        <p14:section name="Раздел без заголовка" id="{AEF26E0D-EBD9-8F47-892A-76229B72CA21}">
-          <p14:sldIdLst>
-            <p14:sldId id="1469"/>
-            <p14:sldId id="1460"/>
-          </p14:sldIdLst>
-        </p14:section>
-      </p14:sectionLst>
+      <ns1:sectionLst>
+        <ns1:section name="General" id="{22CC9C37-6F57-1942-BCD8-73E087642CEC}">
+          <ns1:sldIdLst>
+            <ns1:sldId id="1468"/>
+          </ns1:sldIdLst>
+        </ns1:section>
+        <ns1:section name="Элементы" id="{FCDB1E2F-1EC3-D34C-8BA2-4D02BF810EAE}">
+          <ns1:sldIdLst>
+            <ns1:sldId id="1463"/>
+            <ns1:sldId id="1437"/>
+            <ns1:sldId id="1438"/>
+            <ns1:sldId id="1439"/>
+            <ns1:sldId id="1440"/>
+            <ns1:sldId id="1443"/>
+            <ns1:sldId id="1444"/>
+            <ns1:sldId id="272"/>
+            <ns1:sldId id="1446"/>
+            <ns1:sldId id="1447"/>
+            <ns1:sldId id="1448"/>
+            <ns1:sldId id="1449"/>
+            <ns1:sldId id="1450"/>
+            <ns1:sldId id="1451"/>
+            <ns1:sldId id="1452"/>
+            <ns1:sldId id="271"/>
+          </ns1:sldIdLst>
+        </ns1:section>
+        <ns1:section name="Разделители" id="{BF1577A6-5926-2C42-87A6-8890D7536B01}">
+          <ns1:sldIdLst>
+            <ns1:sldId id="257"/>
+            <ns1:sldId id="259"/>
+            <ns1:sldId id="258"/>
+            <ns1:sldId id="293"/>
+          </ns1:sldIdLst>
+        </ns1:section>
+        <ns1:section name="Текст" id="{6FFE1352-8B79-DE43-8F36-010818B78429}">
+          <ns1:sldIdLst>
+            <ns1:sldId id="260"/>
+            <ns1:sldId id="261"/>
+            <ns1:sldId id="264"/>
+            <ns1:sldId id="288"/>
+            <ns1:sldId id="262"/>
+            <ns1:sldId id="1462"/>
+            <ns1:sldId id="1453"/>
+            <ns1:sldId id="1459"/>
+            <ns1:sldId id="318"/>
+            <ns1:sldId id="319"/>
+          </ns1:sldIdLst>
+        </ns1:section>
+        <ns1:section name="Фото" id="{965C53C9-F4B1-B949-8AFD-332C27ED0612}">
+          <ns1:sldIdLst>
+            <ns1:sldId id="304"/>
+            <ns1:sldId id="305"/>
+            <ns1:sldId id="310"/>
+            <ns1:sldId id="309"/>
+            <ns1:sldId id="311"/>
+            <ns1:sldId id="312"/>
+            <ns1:sldId id="313"/>
+            <ns1:sldId id="1454"/>
+          </ns1:sldIdLst>
+        </ns1:section>
+        <ns1:section name="Карточки" id="{04E5C437-E3D9-1746-B1BA-50115E54AB9B}">
+          <ns1:sldIdLst>
+            <ns1:sldId id="1455"/>
+            <ns1:sldId id="1456"/>
+            <ns1:sldId id="325"/>
+            <ns1:sldId id="327"/>
+          </ns1:sldIdLst>
+        </ns1:section>
+        <ns1:section name="Таблицы" id="{CEAA8852-9645-DE4D-9EE3-BD0DC8F120C6}">
+          <ns1:sldIdLst>
+            <ns1:sldId id="1465"/>
+            <ns1:sldId id="1457"/>
+            <ns1:sldId id="1458"/>
+          </ns1:sldIdLst>
+        </ns1:section>
+        <ns1:section name="Графики" id="{07FA13C4-1ADD-1745-B469-DEBA7B660A99}">
+          <ns1:sldIdLst>
+            <ns1:sldId id="338"/>
+            <ns1:sldId id="339"/>
+            <ns1:sldId id="340"/>
+            <ns1:sldId id="342"/>
+            <ns1:sldId id="345"/>
+            <ns1:sldId id="346"/>
+            <ns1:sldId id="1466"/>
+            <ns1:sldId id="1467"/>
+          </ns1:sldIdLst>
+        </ns1:section>
+        <ns1:section name="Раздел без заголовка" id="{AEF26E0D-EBD9-8F47-892A-76229B72CA21}">
+          <ns1:sldIdLst>
+            <ns1:sldId id="1469"/>
+            <ns1:sldId id="1460"/>
+          </ns1:sldIdLst>
+        </ns1:section>
+      </ns1:sectionLst>
     </p:ext>
     <p:ext uri="{EFAFB233-063F-42B5-8137-9DF3F51BA10A}">
-      <p15:sldGuideLst xmlns:p15="http://schemas.microsoft.com/office/powerpoint/2012/main">
-        <p15:guide id="2" pos="347" userDrawn="1">
-          <p15:clr>
+      <ns2:sldGuideLst>
+        <ns2:guide id="2" pos="347" userDrawn="1">
+          <ns2:clr>
             <a:srgbClr val="A4A3A4"/>
-          </p15:clr>
-        </p15:guide>
-        <p15:guide id="3" orient="horz" pos="777" userDrawn="1">
-          <p15:clr>
+          </ns2:clr>
+        </ns2:guide>
+        <ns2:guide id="3" orient="horz" pos="777" userDrawn="1">
+          <ns2:clr>
             <a:srgbClr val="A4A3A4"/>
-          </p15:clr>
-        </p15:guide>
-        <p15:guide id="7" orient="horz" pos="3475" userDrawn="1">
-          <p15:clr>
+          </ns2:clr>
+        </ns2:guide>
+        <ns2:guide id="7" orient="horz" pos="3475" userDrawn="1">
+          <ns2:clr>
             <a:srgbClr val="A4A3A4"/>
-          </p15:clr>
-        </p15:guide>
-        <p15:guide id="8" orient="horz" pos="1389" userDrawn="1">
-          <p15:clr>
+          </ns2:clr>
+        </ns2:guide>
+        <ns2:guide id="8" orient="horz" pos="1389" userDrawn="1">
+          <ns2:clr>
             <a:srgbClr val="A4A3A4"/>
-          </p15:clr>
-        </p15:guide>
-        <p15:guide id="23" pos="4997" userDrawn="1">
-          <p15:clr>
+          </ns2:clr>
+        </ns2:guide>
+        <ns2:guide id="23" pos="4997" userDrawn="1">
+          <ns2:clr>
             <a:srgbClr val="A4A3A4"/>
-          </p15:clr>
-        </p15:guide>
-        <p15:guide id="24" pos="688" userDrawn="1">
-          <p15:clr>
+          </ns2:clr>
+        </ns2:guide>
+        <ns2:guide id="24" pos="688" userDrawn="1">
+          <ns2:clr>
             <a:srgbClr val="A4A3A4"/>
-          </p15:clr>
-        </p15:guide>
-        <p15:guide id="28" orient="horz" pos="2115" userDrawn="1">
-          <p15:clr>
+          </ns2:clr>
+        </ns2:guide>
+        <ns2:guide id="28" orient="horz" pos="2115" userDrawn="1">
+          <ns2:clr>
             <a:srgbClr val="A4A3A4"/>
-          </p15:clr>
-        </p15:guide>
-        <p15:guide id="29" orient="horz" pos="2341" userDrawn="1">
-          <p15:clr>
+          </ns2:clr>
+        </ns2:guide>
+        <ns2:guide id="29" orient="horz" pos="2341" userDrawn="1">
+          <ns2:clr>
             <a:srgbClr val="A4A3A4"/>
-          </p15:clr>
-        </p15:guide>
-        <p15:guide id="31" pos="1005" userDrawn="1">
-          <p15:clr>
+          </ns2:clr>
+        </ns2:guide>
+        <ns2:guide id="31" pos="1005" userDrawn="1">
+          <ns2:clr>
             <a:srgbClr val="A4A3A4"/>
-          </p15:clr>
-        </p15:guide>
-        <p15:guide id="32" pos="1844" userDrawn="1">
-          <p15:clr>
+          </ns2:clr>
+        </ns2:guide>
+        <ns2:guide id="32" pos="1844" userDrawn="1">
+          <ns2:clr>
             <a:srgbClr val="A4A3A4"/>
-          </p15:clr>
-        </p15:guide>
-        <p15:guide id="33" pos="2071" userDrawn="1">
-          <p15:clr>
+          </ns2:clr>
+        </ns2:guide>
+        <ns2:guide id="33" pos="2071" userDrawn="1">
+          <ns2:clr>
             <a:srgbClr val="A4A3A4"/>
-          </p15:clr>
-        </p15:guide>
-        <p15:guide id="34" pos="2706" userDrawn="1">
-          <p15:clr>
+          </ns2:clr>
+        </ns2:guide>
+        <ns2:guide id="34" pos="2706" userDrawn="1">
+          <ns2:clr>
             <a:srgbClr val="A4A3A4"/>
-          </p15:clr>
-        </p15:guide>
-        <p15:guide id="35" pos="3069" userDrawn="1">
-          <p15:clr>
+          </ns2:clr>
+        </ns2:guide>
+        <ns2:guide id="35" pos="3069" userDrawn="1">
+          <ns2:clr>
             <a:srgbClr val="A4A3A4"/>
-          </p15:clr>
-        </p15:guide>
-        <p15:guide id="37" pos="4248" userDrawn="1">
-          <p15:clr>
+          </ns2:clr>
+        </ns2:guide>
+        <ns2:guide id="37" pos="4248" userDrawn="1">
+          <ns2:clr>
             <a:srgbClr val="A4A3A4"/>
-          </p15:clr>
-        </p15:guide>
-        <p15:guide id="38" pos="4520" userDrawn="1">
-          <p15:clr>
+          </ns2:clr>
+        </ns2:guide>
+        <ns2:guide id="38" pos="4520" userDrawn="1">
+          <ns2:clr>
             <a:srgbClr val="A4A3A4"/>
-          </p15:clr>
-        </p15:guide>
-        <p15:guide id="40" pos="5518" userDrawn="1">
-          <p15:clr>
+          </ns2:clr>
+        </ns2:guide>
+        <ns2:guide id="40" pos="5518" userDrawn="1">
+          <ns2:clr>
             <a:srgbClr val="A4A3A4"/>
-          </p15:clr>
-        </p15:guide>
-        <p15:guide id="42" pos="7083" userDrawn="1">
-          <p15:clr>
+          </ns2:clr>
+        </ns2:guide>
+        <ns2:guide id="42" pos="7083" userDrawn="1">
+          <ns2:clr>
             <a:srgbClr val="A4A3A4"/>
-          </p15:clr>
-        </p15:guide>
-        <p15:guide id="43" orient="horz" pos="1049" userDrawn="1">
-          <p15:clr>
+          </ns2:clr>
+        </ns2:guide>
+        <ns2:guide id="43" orient="horz" pos="1049" userDrawn="1">
+          <ns2:clr>
             <a:srgbClr val="A4A3A4"/>
-          </p15:clr>
-        </p15:guide>
-        <p15:guide id="44" orient="horz" pos="1638" userDrawn="1">
-          <p15:clr>
+          </ns2:clr>
+        </ns2:guide>
+        <ns2:guide id="44" orient="horz" pos="1638" userDrawn="1">
+          <ns2:clr>
             <a:srgbClr val="A4A3A4"/>
-          </p15:clr>
-        </p15:guide>
-        <p15:guide id="45" orient="horz" pos="1820" userDrawn="1">
-          <p15:clr>
+          </ns2:clr>
+        </ns2:guide>
+        <ns2:guide id="45" orient="horz" pos="1820" userDrawn="1">
+          <ns2:clr>
             <a:srgbClr val="A4A3A4"/>
-          </p15:clr>
-        </p15:guide>
-        <p15:guide id="46" orient="horz" pos="2795" userDrawn="1">
-          <p15:clr>
+          </ns2:clr>
+        </ns2:guide>
+        <ns2:guide id="46" orient="horz" pos="2795" userDrawn="1">
+          <ns2:clr>
             <a:srgbClr val="A4A3A4"/>
-          </p15:clr>
-        </p15:guide>
-        <p15:guide id="47" orient="horz" pos="2500" userDrawn="1">
-          <p15:clr>
+          </ns2:clr>
+        </ns2:guide>
+        <ns2:guide id="47" orient="horz" pos="2500" userDrawn="1">
+          <ns2:clr>
             <a:srgbClr val="A4A3A4"/>
-          </p15:clr>
-        </p15:guide>
-        <p15:guide id="48" orient="horz" pos="3045" userDrawn="1">
-          <p15:clr>
+          </ns2:clr>
+        </ns2:guide>
+        <ns2:guide id="48" orient="horz" pos="3045" userDrawn="1">
+          <ns2:clr>
             <a:srgbClr val="A4A3A4"/>
-          </p15:clr>
-        </p15:guide>
-        <p15:guide id="49" orient="horz" pos="3203" userDrawn="1">
-          <p15:clr>
+          </ns2:clr>
+        </ns2:guide>
+        <ns2:guide id="49" orient="horz" pos="3203" userDrawn="1">
+          <ns2:clr>
             <a:srgbClr val="A4A3A4"/>
-          </p15:clr>
-        </p15:guide>
-        <p15:guide id="50" pos="3409" userDrawn="1">
-          <p15:clr>
+          </ns2:clr>
+        </ns2:guide>
+        <ns2:guide id="50" pos="3409" userDrawn="1">
+          <ns2:clr>
             <a:srgbClr val="A4A3A4"/>
-          </p15:clr>
-        </p15:guide>
-      </p15:sldGuideLst>
+          </ns2:clr>
+        </ns2:guide>
+      </ns2:sldGuideLst>
     </p:ext>
   </p:extLst>
 </p:presentation>
 </file>
 
 <file path=ppt/handoutMasters/handoutMaster1.xml><?xml version="1.0" encoding="utf-8"?>
-<p:handoutMaster xmlns:a="http://schemas.openxmlformats.org/drawingml/2006/main" xmlns:r="http://schemas.openxmlformats.org/officeDocument/2006/relationships" xmlns:p="http://schemas.openxmlformats.org/presentationml/2006/main">
+<p:handoutMaster xmlns:p="http://schemas.openxmlformats.org/presentationml/2006/main" xmlns:a="http://schemas.openxmlformats.org/drawingml/2006/main" xmlns:ns1="http://schemas.microsoft.com/office/drawing/2014/main" xmlns:ns2="http://schemas.microsoft.com/office/powerpoint/2010/main" xmlns:ns3="http://schemas.microsoft.com/office/powerpoint/2012/main">
   <p:cSld>
     <p:bg>
       <p:bgRef idx="1001">
@@ -410,7 +410,7 @@
           <p:cNvPr id="2" name="Верхний колонтитул 1">
             <a:extLst>
               <a:ext uri="{FF2B5EF4-FFF2-40B4-BE49-F238E27FC236}">
-                <a16:creationId xmlns:a16="http://schemas.microsoft.com/office/drawing/2014/main" id="{1BC1E7CA-5EE1-3DA7-32C0-6F53CE36D861}"/>
+                <ns1:creationId id="{1BC1E7CA-5EE1-3DA7-32C0-6F53CE36D861}"/>
               </a:ext>
             </a:extLst>
           </p:cNvPr>
@@ -447,7 +447,7 @@
           <p:cNvPr id="3" name="Дата 2">
             <a:extLst>
               <a:ext uri="{FF2B5EF4-FFF2-40B4-BE49-F238E27FC236}">
-                <a16:creationId xmlns:a16="http://schemas.microsoft.com/office/drawing/2014/main" id="{9F8C8D15-B82F-FC52-0CD1-02BED144CF44}"/>
+                <ns1:creationId id="{9F8C8D15-B82F-FC52-0CD1-02BED144CF44}"/>
               </a:ext>
             </a:extLst>
           </p:cNvPr>
@@ -488,7 +488,7 @@
           <p:cNvPr id="4" name="Нижний колонтитул 3">
             <a:extLst>
               <a:ext uri="{FF2B5EF4-FFF2-40B4-BE49-F238E27FC236}">
-                <a16:creationId xmlns:a16="http://schemas.microsoft.com/office/drawing/2014/main" id="{3BFF98C1-C544-E550-4E51-6A793ACDDFAF}"/>
+                <ns1:creationId id="{3BFF98C1-C544-E550-4E51-6A793ACDDFAF}"/>
               </a:ext>
             </a:extLst>
           </p:cNvPr>
@@ -525,7 +525,7 @@
           <p:cNvPr id="5" name="Номер слайда 4">
             <a:extLst>
               <a:ext uri="{FF2B5EF4-FFF2-40B4-BE49-F238E27FC236}">
-                <a16:creationId xmlns:a16="http://schemas.microsoft.com/office/drawing/2014/main" id="{8C66E615-93FE-1272-C1B8-E41B5A56FA79}"/>
+                <ns1:creationId id="{8C66E615-93FE-1272-C1B8-E41B5A56FA79}"/>
               </a:ext>
             </a:extLst>
           </p:cNvPr>
@@ -564,32 +564,32 @@
     </p:spTree>
     <p:extLst>
       <p:ext uri="{BB962C8B-B14F-4D97-AF65-F5344CB8AC3E}">
-        <p14:creationId xmlns:p14="http://schemas.microsoft.com/office/powerpoint/2010/main" val="3739718150"/>
+        <ns2:creationId val="3739718150"/>
       </p:ext>
     </p:extLst>
   </p:cSld>
   <p:clrMap bg1="lt1" tx1="dk1" bg2="lt2" tx2="dk2" accent1="accent1" accent2="accent2" accent3="accent3" accent4="accent4" accent5="accent5" accent6="accent6" hlink="hlink" folHlink="folHlink"/>
   <p:extLst>
     <p:ext uri="{56416CCD-93CA-4268-BC5B-53C4BB910035}">
-      <p15:sldGuideLst xmlns:p15="http://schemas.microsoft.com/office/powerpoint/2012/main">
-        <p15:guide id="1" orient="horz" pos="2160" userDrawn="1">
-          <p15:clr>
+      <ns3:sldGuideLst>
+        <ns3:guide id="1" orient="horz" pos="2160" userDrawn="1">
+          <ns3:clr>
             <a:srgbClr val="F26B43"/>
-          </p15:clr>
-        </p15:guide>
-        <p15:guide id="2" pos="3840" userDrawn="1">
-          <p15:clr>
+          </ns3:clr>
+        </ns3:guide>
+        <ns3:guide id="2" pos="3840" userDrawn="1">
+          <ns3:clr>
             <a:srgbClr val="F26B43"/>
-          </p15:clr>
-        </p15:guide>
-      </p15:sldGuideLst>
+          </ns3:clr>
+        </ns3:guide>
+      </ns3:sldGuideLst>
     </p:ext>
   </p:extLst>
 </p:handoutMaster>
 </file>
 
 <file path=ppt/notesMasters/notesMaster1.xml><?xml version="1.0" encoding="utf-8"?>
-<p:notesMaster xmlns:a="http://schemas.openxmlformats.org/drawingml/2006/main" xmlns:r="http://schemas.openxmlformats.org/officeDocument/2006/relationships" xmlns:p="http://schemas.openxmlformats.org/presentationml/2006/main">
+<p:notesMaster xmlns:p="http://schemas.openxmlformats.org/presentationml/2006/main" xmlns:a="http://schemas.openxmlformats.org/drawingml/2006/main" xmlns:ns1="http://schemas.microsoft.com/office/powerpoint/2010/main" xmlns:ns2="http://schemas.microsoft.com/office/powerpoint/2012/main">
   <p:cSld>
     <p:bg>
       <p:bgRef idx="1001">
@@ -837,7 +837,7 @@
     </p:spTree>
     <p:extLst>
       <p:ext uri="{BB962C8B-B14F-4D97-AF65-F5344CB8AC3E}">
-        <p14:creationId xmlns:p14="http://schemas.microsoft.com/office/powerpoint/2010/main" val="3612325495"/>
+        <ns1:creationId val="3612325495"/>
       </p:ext>
     </p:extLst>
   </p:cSld>
@@ -936,25 +936,25 @@
   </p:notesStyle>
   <p:extLst>
     <p:ext uri="{620B2872-D7B9-4A21-9093-7833F8D536E1}">
-      <p15:sldGuideLst xmlns:p15="http://schemas.microsoft.com/office/powerpoint/2012/main">
-        <p15:guide id="1" orient="horz" pos="2160" userDrawn="1">
-          <p15:clr>
+      <ns2:sldGuideLst>
+        <ns2:guide id="1" orient="horz" pos="2160" userDrawn="1">
+          <ns2:clr>
             <a:srgbClr val="F26B43"/>
-          </p15:clr>
-        </p15:guide>
-        <p15:guide id="2" pos="3840" userDrawn="1">
-          <p15:clr>
+          </ns2:clr>
+        </ns2:guide>
+        <ns2:guide id="2" pos="3840" userDrawn="1">
+          <ns2:clr>
             <a:srgbClr val="F26B43"/>
-          </p15:clr>
-        </p15:guide>
-      </p15:sldGuideLst>
+          </ns2:clr>
+        </ns2:guide>
+      </ns2:sldGuideLst>
     </p:ext>
   </p:extLst>
 </p:notesMaster>
 </file>
 
 <file path=ppt/slideLayouts/slideLayout1.xml><?xml version="1.0" encoding="utf-8"?>
-<p:sldLayout xmlns:a="http://schemas.openxmlformats.org/drawingml/2006/main" xmlns:r="http://schemas.openxmlformats.org/officeDocument/2006/relationships" xmlns:p="http://schemas.openxmlformats.org/presentationml/2006/main" preserve="1">
+<p:sldLayout xmlns:p="http://schemas.openxmlformats.org/presentationml/2006/main" xmlns:a="http://schemas.openxmlformats.org/drawingml/2006/main" xmlns:ns1="http://schemas.microsoft.com/office/drawing/2014/main" xmlns:ns3="http://schemas.microsoft.com/office/powerpoint/2010/main" preserve="1">
   <p:cSld name="Дополнительный слайд светлый">
     <p:bg>
       <p:bgPr>
@@ -1021,7 +1021,7 @@
           <a:p>
             <a:r>
               <a:rPr lang="ru-RU" dirty="0"/>
-              <a:t>Текст заголовка 2</a:t>
+              <a:t/>
             </a:r>
           </a:p>
         </p:txBody>
@@ -1093,8 +1093,7 @@
             <a:pPr lvl="0"/>
             <a:r>
               <a:rPr lang="ru-RU" dirty="0"/>
-              <a:t>Образец текста
-</a:t>
+              <a:t/>
             </a:r>
           </a:p>
         </p:txBody>
@@ -1125,7 +1124,7 @@
             <a:fld id="{8694583C-1372-4011-817E-52B3A6677622}" type="slidenum">
               <a:rPr lang="ru-RU" smtClean="0"/>
               <a:pPr/>
-              <a:t>‹#›</a:t>
+              <a:t/>
             </a:fld>
             <a:endParaRPr lang="ru-RU" dirty="0"/>
           </a:p>
@@ -1136,7 +1135,7 @@
           <p:cNvPr id="8" name="Текст 2">
             <a:extLst>
               <a:ext uri="{FF2B5EF4-FFF2-40B4-BE49-F238E27FC236}">
-                <a16:creationId xmlns:a16="http://schemas.microsoft.com/office/drawing/2014/main" id="{07E7CADD-4FB9-F646-A189-5CB6430FD378}"/>
+                <ns1:creationId id="{07E7CADD-4FB9-F646-A189-5CB6430FD378}"/>
               </a:ext>
             </a:extLst>
           </p:cNvPr>
@@ -1205,309 +1204,15 @@
             <a:pPr lvl="0"/>
             <a:r>
               <a:rPr lang="ru-RU" dirty="0"/>
-              <a:t>Заголовок блока</a:t>
+              <a:t/>
             </a:r>
           </a:p>
         </p:txBody>
       </p:sp>
-      <p:pic>
-        <p:nvPicPr>
-          <p:cNvPr id="11" name="Рисунок 10" descr="http://9AF63770E53DE8DDF9995A521138D60A.dms.sberbank.ru/9AF63770E53DE8DDF9995A521138D60A-0AA3C0FD1608A3AD06877213F42D883A-4A047BAE9BFE11B2E493D089584F7A14/1.png"/>
-          <p:cNvPicPr>
-            <a:picLocks/>
-          </p:cNvPicPr>
-          <p:nvPr/>
-        </p:nvPicPr>
-        <p:blipFill>
-          <a:blip r:link="rId2"/>
-          <a:stretch>
-            <a:fillRect/>
-          </a:stretch>
-        </p:blipFill>
-        <p:spPr>
-          <a:xfrm>
-            <a:off x="0" y="0"/>
-            <a:ext cx="1588" cy="1588"/>
-          </a:xfrm>
-          <a:prstGeom prst="rect">
-            <a:avLst/>
-          </a:prstGeom>
-        </p:spPr>
-      </p:pic>
-      <p:pic>
-        <p:nvPicPr>
-          <p:cNvPr id="12" name="Рисунок 11" descr="http://9AF63770E53DE8DDF9995A521138D60A.dms.sberbank.ru/9AF63770E53DE8DDF9995A521138D60A-0AA3C0FD1608A3AD06877213F42D883A-4A047BAE9BFE11B2E493D089584F7A14/1.png"/>
-          <p:cNvPicPr>
-            <a:picLocks/>
-          </p:cNvPicPr>
-          <p:nvPr/>
-        </p:nvPicPr>
-        <p:blipFill>
-          <a:blip r:link="rId2"/>
-          <a:stretch>
-            <a:fillRect/>
-          </a:stretch>
-        </p:blipFill>
-        <p:spPr>
-          <a:xfrm>
-            <a:off x="0" y="0"/>
-            <a:ext cx="1588" cy="1588"/>
-          </a:xfrm>
-          <a:prstGeom prst="rect">
-            <a:avLst/>
-          </a:prstGeom>
-        </p:spPr>
-      </p:pic>
-      <p:pic>
-        <p:nvPicPr>
-          <p:cNvPr id="13" name="Рисунок 12" descr="http://9AF63770E53DE8DDF9995A521138D60A.dms.sberbank.ru/9AF63770E53DE8DDF9995A521138D60A-0AA3C0FD1608A3AD06877213F42D883A-4A047BAE9BFE11B2E493D089584F7A14/1.png"/>
-          <p:cNvPicPr>
-            <a:picLocks/>
-          </p:cNvPicPr>
-          <p:nvPr/>
-        </p:nvPicPr>
-        <p:blipFill>
-          <a:blip r:link="rId2"/>
-          <a:stretch>
-            <a:fillRect/>
-          </a:stretch>
-        </p:blipFill>
-        <p:spPr>
-          <a:xfrm>
-            <a:off x="0" y="0"/>
-            <a:ext cx="1588" cy="1588"/>
-          </a:xfrm>
-          <a:prstGeom prst="rect">
-            <a:avLst/>
-          </a:prstGeom>
-        </p:spPr>
-      </p:pic>
-      <p:pic>
-        <p:nvPicPr>
-          <p:cNvPr id="14" name="Рисунок 13" descr="http://9AF63770E53DE8DDF9995A521138D60A.dms.sberbank.ru/9AF63770E53DE8DDF9995A521138D60A-0AA3C0FD1608A3AD06877213F42D883A-4A047BAE9BFE11B2E493D089584F7A14/1.png"/>
-          <p:cNvPicPr>
-            <a:picLocks/>
-          </p:cNvPicPr>
-          <p:nvPr/>
-        </p:nvPicPr>
-        <p:blipFill>
-          <a:blip r:link="rId2"/>
-          <a:stretch>
-            <a:fillRect/>
-          </a:stretch>
-        </p:blipFill>
-        <p:spPr>
-          <a:xfrm>
-            <a:off x="0" y="0"/>
-            <a:ext cx="1588" cy="1588"/>
-          </a:xfrm>
-          <a:prstGeom prst="rect">
-            <a:avLst/>
-          </a:prstGeom>
-        </p:spPr>
-      </p:pic>
-      <p:pic>
-        <p:nvPicPr>
-          <p:cNvPr id="15" name="Рисунок 14">
-            <a:extLst>
-              <a:ext uri="{FF2B5EF4-FFF2-40B4-BE49-F238E27FC236}">
-                <a16:creationId xmlns:a16="http://schemas.microsoft.com/office/drawing/2014/main" id="{F81DE017-3EDD-C049-8227-72C426B9B735}"/>
-              </a:ext>
-            </a:extLst>
-          </p:cNvPr>
-          <p:cNvPicPr>
-            <a:picLocks noChangeAspect="1"/>
-          </p:cNvPicPr>
-          <p:nvPr/>
-        </p:nvPicPr>
-        <p:blipFill>
-          <a:blip>
-            <a:extLst>
-              <a:ext uri="{28A0092B-C50C-407E-A947-70E740481C1C}">
-                <a14:useLocalDpi xmlns:a14="http://schemas.microsoft.com/office/drawing/2010/main" val="0"/>
-              </a:ext>
-              <a:ext uri="{96DAC541-7B7A-43D3-8B79-37D633B846F1}">
-                <asvg:svgBlip xmlns:asvg="http://schemas.microsoft.com/office/drawing/2016/SVG/main" r:embed="rId3"/>
-              </a:ext>
-            </a:extLst>
-          </a:blip>
-          <a:stretch>
-            <a:fillRect/>
-          </a:stretch>
-        </p:blipFill>
-        <p:spPr>
-          <a:xfrm>
-            <a:off x="576001" y="302400"/>
-            <a:ext cx="1432560" cy="225117"/>
-          </a:xfrm>
-          <a:prstGeom prst="rect">
-            <a:avLst/>
-          </a:prstGeom>
-        </p:spPr>
-      </p:pic>
-      <p:pic>
-        <p:nvPicPr>
-          <p:cNvPr id="2" name="Рисунок 1" descr="http://9AF63770E53DE8DDF9995A521138D60A.dms.sberbank.ru/9AF63770E53DE8DDF9995A521138D60A-0AA3C0FD1608A3AD06877213F42D883A-4A047BAE9BFE11B2E493D089584F7A14/1.png">
-            <a:extLst>
-              <a:ext uri="{FF2B5EF4-FFF2-40B4-BE49-F238E27FC236}">
-                <a16:creationId xmlns:a16="http://schemas.microsoft.com/office/drawing/2014/main" id="{A35C1261-AB38-25EB-F270-51B133CE4206}"/>
-              </a:ext>
-            </a:extLst>
-          </p:cNvPr>
-          <p:cNvPicPr>
-            <a:picLocks/>
-          </p:cNvPicPr>
-          <p:nvPr userDrawn="1"/>
-        </p:nvPicPr>
-        <p:blipFill>
-          <a:blip r:link="rId2"/>
-          <a:stretch>
-            <a:fillRect/>
-          </a:stretch>
-        </p:blipFill>
-        <p:spPr>
-          <a:xfrm>
-            <a:off x="0" y="0"/>
-            <a:ext cx="1588" cy="1588"/>
-          </a:xfrm>
-          <a:prstGeom prst="rect">
-            <a:avLst/>
-          </a:prstGeom>
-        </p:spPr>
-      </p:pic>
-      <p:pic>
-        <p:nvPicPr>
-          <p:cNvPr id="4" name="Рисунок 3" descr="http://9AF63770E53DE8DDF9995A521138D60A.dms.sberbank.ru/9AF63770E53DE8DDF9995A521138D60A-0AA3C0FD1608A3AD06877213F42D883A-4A047BAE9BFE11B2E493D089584F7A14/1.png">
-            <a:extLst>
-              <a:ext uri="{FF2B5EF4-FFF2-40B4-BE49-F238E27FC236}">
-                <a16:creationId xmlns:a16="http://schemas.microsoft.com/office/drawing/2014/main" id="{84F49F31-C5D8-B5AF-8F41-DA0A19FBEBC3}"/>
-              </a:ext>
-            </a:extLst>
-          </p:cNvPr>
-          <p:cNvPicPr>
-            <a:picLocks/>
-          </p:cNvPicPr>
-          <p:nvPr userDrawn="1"/>
-        </p:nvPicPr>
-        <p:blipFill>
-          <a:blip r:link="rId2"/>
-          <a:stretch>
-            <a:fillRect/>
-          </a:stretch>
-        </p:blipFill>
-        <p:spPr>
-          <a:xfrm>
-            <a:off x="0" y="0"/>
-            <a:ext cx="1588" cy="1588"/>
-          </a:xfrm>
-          <a:prstGeom prst="rect">
-            <a:avLst/>
-          </a:prstGeom>
-        </p:spPr>
-      </p:pic>
-      <p:pic>
-        <p:nvPicPr>
-          <p:cNvPr id="5" name="Рисунок 4" descr="http://9AF63770E53DE8DDF9995A521138D60A.dms.sberbank.ru/9AF63770E53DE8DDF9995A521138D60A-0AA3C0FD1608A3AD06877213F42D883A-4A047BAE9BFE11B2E493D089584F7A14/1.png">
-            <a:extLst>
-              <a:ext uri="{FF2B5EF4-FFF2-40B4-BE49-F238E27FC236}">
-                <a16:creationId xmlns:a16="http://schemas.microsoft.com/office/drawing/2014/main" id="{1D4D9BFB-F5F0-0B75-16DE-DB07A6B03AB0}"/>
-              </a:ext>
-            </a:extLst>
-          </p:cNvPr>
-          <p:cNvPicPr>
-            <a:picLocks/>
-          </p:cNvPicPr>
-          <p:nvPr userDrawn="1"/>
-        </p:nvPicPr>
-        <p:blipFill>
-          <a:blip r:link="rId2"/>
-          <a:stretch>
-            <a:fillRect/>
-          </a:stretch>
-        </p:blipFill>
-        <p:spPr>
-          <a:xfrm>
-            <a:off x="0" y="0"/>
-            <a:ext cx="1588" cy="1588"/>
-          </a:xfrm>
-          <a:prstGeom prst="rect">
-            <a:avLst/>
-          </a:prstGeom>
-        </p:spPr>
-      </p:pic>
-      <p:pic>
-        <p:nvPicPr>
-          <p:cNvPr id="7" name="Рисунок 6" descr="http://9AF63770E53DE8DDF9995A521138D60A.dms.sberbank.ru/9AF63770E53DE8DDF9995A521138D60A-0AA3C0FD1608A3AD06877213F42D883A-4A047BAE9BFE11B2E493D089584F7A14/1.png">
-            <a:extLst>
-              <a:ext uri="{FF2B5EF4-FFF2-40B4-BE49-F238E27FC236}">
-                <a16:creationId xmlns:a16="http://schemas.microsoft.com/office/drawing/2014/main" id="{065A523F-ED15-2A65-A0C3-2A037DCC5C18}"/>
-              </a:ext>
-            </a:extLst>
-          </p:cNvPr>
-          <p:cNvPicPr>
-            <a:picLocks/>
-          </p:cNvPicPr>
-          <p:nvPr userDrawn="1"/>
-        </p:nvPicPr>
-        <p:blipFill>
-          <a:blip r:link="rId2"/>
-          <a:stretch>
-            <a:fillRect/>
-          </a:stretch>
-        </p:blipFill>
-        <p:spPr>
-          <a:xfrm>
-            <a:off x="0" y="0"/>
-            <a:ext cx="1588" cy="1588"/>
-          </a:xfrm>
-          <a:prstGeom prst="rect">
-            <a:avLst/>
-          </a:prstGeom>
-        </p:spPr>
-      </p:pic>
-      <p:pic>
-        <p:nvPicPr>
-          <p:cNvPr id="9" name="Рисунок 8">
-            <a:extLst>
-              <a:ext uri="{FF2B5EF4-FFF2-40B4-BE49-F238E27FC236}">
-                <a16:creationId xmlns:a16="http://schemas.microsoft.com/office/drawing/2014/main" id="{D9862D8B-D587-3CCA-57EC-573324311286}"/>
-              </a:ext>
-            </a:extLst>
-          </p:cNvPr>
-          <p:cNvPicPr>
-            <a:picLocks noChangeAspect="1"/>
-          </p:cNvPicPr>
-          <p:nvPr userDrawn="1"/>
-        </p:nvPicPr>
-        <p:blipFill>
-          <a:blip>
-            <a:extLst>
-              <a:ext uri="{28A0092B-C50C-407E-A947-70E740481C1C}">
-                <a14:useLocalDpi xmlns:a14="http://schemas.microsoft.com/office/drawing/2010/main" val="0"/>
-              </a:ext>
-              <a:ext uri="{96DAC541-7B7A-43D3-8B79-37D633B846F1}">
-                <asvg:svgBlip xmlns:asvg="http://schemas.microsoft.com/office/drawing/2016/SVG/main" r:embed="rId3"/>
-              </a:ext>
-            </a:extLst>
-          </a:blip>
-          <a:stretch>
-            <a:fillRect/>
-          </a:stretch>
-        </p:blipFill>
-        <p:spPr>
-          <a:xfrm>
-            <a:off x="576001" y="302400"/>
-            <a:ext cx="1432560" cy="225117"/>
-          </a:xfrm>
-          <a:prstGeom prst="rect">
-            <a:avLst/>
-          </a:prstGeom>
-        </p:spPr>
-      </p:pic>
     </p:spTree>
     <p:extLst>
       <p:ext uri="{BB962C8B-B14F-4D97-AF65-F5344CB8AC3E}">
-        <p14:creationId xmlns:p14="http://schemas.microsoft.com/office/powerpoint/2010/main" val="1829028507"/>
+        <ns3:creationId val="1829028507"/>
       </p:ext>
     </p:extLst>
   </p:cSld>
@@ -1519,7 +1224,7 @@
 </file>
 
 <file path=ppt/slideLayouts/slideLayout10.xml><?xml version="1.0" encoding="utf-8"?>
-<p:sldLayout xmlns:a="http://schemas.openxmlformats.org/drawingml/2006/main" xmlns:r="http://schemas.openxmlformats.org/officeDocument/2006/relationships" xmlns:p="http://schemas.openxmlformats.org/presentationml/2006/main" showMasterPhAnim="0" userDrawn="1">
+<p:sldLayout xmlns:p="http://schemas.openxmlformats.org/presentationml/2006/main" xmlns:a="http://schemas.openxmlformats.org/drawingml/2006/main" xmlns:ns1="http://schemas.microsoft.com/office/drawing/2014/main" xmlns:ns2="http://schemas.microsoft.com/office/powerpoint/2010/main" showMasterPhAnim="0" userDrawn="1">
   <p:cSld name="Основной 4">
     <p:spTree>
       <p:nvGrpSpPr>
@@ -1535,48 +1240,12 @@
           <a:chExt cx="0" cy="0"/>
         </a:xfrm>
       </p:grpSpPr>
-      <p:pic>
-        <p:nvPicPr>
-          <p:cNvPr id="4" name="Рисунок 3">
-            <a:extLst>
-              <a:ext uri="{FF2B5EF4-FFF2-40B4-BE49-F238E27FC236}">
-                <a16:creationId xmlns:a16="http://schemas.microsoft.com/office/drawing/2014/main" id="{F56CE0A9-00A5-7FB4-2F4D-797A3BF1A921}"/>
-              </a:ext>
-            </a:extLst>
-          </p:cNvPr>
-          <p:cNvPicPr>
-            <a:picLocks noChangeAspect="1"/>
-          </p:cNvPicPr>
-          <p:nvPr userDrawn="1"/>
-        </p:nvPicPr>
-        <p:blipFill>
-          <a:blip r:embed="rId2" cstate="screen">
-            <a:extLst>
-              <a:ext uri="{28A0092B-C50C-407E-A947-70E740481C1C}">
-                <a14:useLocalDpi xmlns:a14="http://schemas.microsoft.com/office/drawing/2010/main"/>
-              </a:ext>
-            </a:extLst>
-          </a:blip>
-          <a:stretch>
-            <a:fillRect/>
-          </a:stretch>
-        </p:blipFill>
-        <p:spPr>
-          <a:xfrm>
-            <a:off x="0" y="0"/>
-            <a:ext cx="12192000" cy="6858000"/>
-          </a:xfrm>
-          <a:prstGeom prst="rect">
-            <a:avLst/>
-          </a:prstGeom>
-        </p:spPr>
-      </p:pic>
       <p:sp>
         <p:nvSpPr>
           <p:cNvPr id="2" name="Заголовок 6">
             <a:extLst>
               <a:ext uri="{FF2B5EF4-FFF2-40B4-BE49-F238E27FC236}">
-                <a16:creationId xmlns:a16="http://schemas.microsoft.com/office/drawing/2014/main" id="{27695FA2-0915-C3FE-BEBE-45F24A83781C}"/>
+                <ns1:creationId id="{27695FA2-0915-C3FE-BEBE-45F24A83781C}"/>
               </a:ext>
             </a:extLst>
           </p:cNvPr>
@@ -1617,7 +1286,7 @@
             <a:pPr marL="0" lvl="0"/>
             <a:r>
               <a:rPr lang="ru-RU" dirty="0"/>
-              <a:t>Образец заголовка</a:t>
+              <a:t/>
             </a:r>
           </a:p>
         </p:txBody>
@@ -1627,7 +1296,7 @@
           <p:cNvPr id="3" name="Текст 9">
             <a:extLst>
               <a:ext uri="{FF2B5EF4-FFF2-40B4-BE49-F238E27FC236}">
-                <a16:creationId xmlns:a16="http://schemas.microsoft.com/office/drawing/2014/main" id="{B8FF11B5-5E30-D1F7-CF79-3830C6CDCC52}"/>
+                <ns1:creationId id="{B8FF11B5-5E30-D1F7-CF79-3830C6CDCC52}"/>
               </a:ext>
             </a:extLst>
           </p:cNvPr>
@@ -1668,7 +1337,7 @@
             <a:pPr marL="0" lvl="0"/>
             <a:r>
               <a:rPr lang="ru-RU" dirty="0"/>
-              <a:t>Образец подзаголовка</a:t>
+              <a:t/>
             </a:r>
           </a:p>
         </p:txBody>
@@ -1676,7 +1345,7 @@
     </p:spTree>
     <p:extLst>
       <p:ext uri="{BB962C8B-B14F-4D97-AF65-F5344CB8AC3E}">
-        <p14:creationId xmlns:p14="http://schemas.microsoft.com/office/powerpoint/2010/main" val="1710605923"/>
+        <ns2:creationId val="1710605923"/>
       </p:ext>
     </p:extLst>
   </p:cSld>
@@ -1687,7 +1356,7 @@
 </file>
 
 <file path=ppt/slideLayouts/slideLayout11.xml><?xml version="1.0" encoding="utf-8"?>
-<p:sldLayout xmlns:a="http://schemas.openxmlformats.org/drawingml/2006/main" xmlns:r="http://schemas.openxmlformats.org/officeDocument/2006/relationships" xmlns:p="http://schemas.openxmlformats.org/presentationml/2006/main" showMasterPhAnim="0" userDrawn="1">
+<p:sldLayout xmlns:p="http://schemas.openxmlformats.org/presentationml/2006/main" xmlns:a="http://schemas.openxmlformats.org/drawingml/2006/main" xmlns:ns1="http://schemas.microsoft.com/office/drawing/2014/main" xmlns:ns2="http://schemas.microsoft.com/office/powerpoint/2010/main" showMasterPhAnim="0" userDrawn="1">
   <p:cSld name="Основной 5">
     <p:spTree>
       <p:nvGrpSpPr>
@@ -1703,48 +1372,12 @@
           <a:chExt cx="0" cy="0"/>
         </a:xfrm>
       </p:grpSpPr>
-      <p:pic>
-        <p:nvPicPr>
-          <p:cNvPr id="4" name="Рисунок 3">
-            <a:extLst>
-              <a:ext uri="{FF2B5EF4-FFF2-40B4-BE49-F238E27FC236}">
-                <a16:creationId xmlns:a16="http://schemas.microsoft.com/office/drawing/2014/main" id="{BB6EACBD-92DD-363B-7BAB-59CF2885F7EF}"/>
-              </a:ext>
-            </a:extLst>
-          </p:cNvPr>
-          <p:cNvPicPr>
-            <a:picLocks noChangeAspect="1"/>
-          </p:cNvPicPr>
-          <p:nvPr userDrawn="1"/>
-        </p:nvPicPr>
-        <p:blipFill>
-          <a:blip r:embed="rId2" cstate="screen">
-            <a:extLst>
-              <a:ext uri="{28A0092B-C50C-407E-A947-70E740481C1C}">
-                <a14:useLocalDpi xmlns:a14="http://schemas.microsoft.com/office/drawing/2010/main"/>
-              </a:ext>
-            </a:extLst>
-          </a:blip>
-          <a:stretch>
-            <a:fillRect/>
-          </a:stretch>
-        </p:blipFill>
-        <p:spPr>
-          <a:xfrm>
-            <a:off x="0" y="0"/>
-            <a:ext cx="12192000" cy="6858000"/>
-          </a:xfrm>
-          <a:prstGeom prst="rect">
-            <a:avLst/>
-          </a:prstGeom>
-        </p:spPr>
-      </p:pic>
       <p:sp>
         <p:nvSpPr>
           <p:cNvPr id="2" name="Заголовок 6">
             <a:extLst>
               <a:ext uri="{FF2B5EF4-FFF2-40B4-BE49-F238E27FC236}">
-                <a16:creationId xmlns:a16="http://schemas.microsoft.com/office/drawing/2014/main" id="{F83905C9-A0E5-3EC7-AC41-F1A39BB2520C}"/>
+                <ns1:creationId id="{F83905C9-A0E5-3EC7-AC41-F1A39BB2520C}"/>
               </a:ext>
             </a:extLst>
           </p:cNvPr>
@@ -1785,7 +1418,7 @@
             <a:pPr marL="0" lvl="0"/>
             <a:r>
               <a:rPr lang="ru-RU" dirty="0"/>
-              <a:t>Образец заголовка</a:t>
+              <a:t/>
             </a:r>
           </a:p>
         </p:txBody>
@@ -1795,7 +1428,7 @@
           <p:cNvPr id="3" name="Текст 9">
             <a:extLst>
               <a:ext uri="{FF2B5EF4-FFF2-40B4-BE49-F238E27FC236}">
-                <a16:creationId xmlns:a16="http://schemas.microsoft.com/office/drawing/2014/main" id="{0E6E82DD-F568-91F0-F91E-1DA0FDE32DE3}"/>
+                <ns1:creationId id="{0E6E82DD-F568-91F0-F91E-1DA0FDE32DE3}"/>
               </a:ext>
             </a:extLst>
           </p:cNvPr>
@@ -1836,7 +1469,7 @@
             <a:pPr marL="0" lvl="0"/>
             <a:r>
               <a:rPr lang="ru-RU" dirty="0"/>
-              <a:t>Образец подзаголовка</a:t>
+              <a:t/>
             </a:r>
           </a:p>
         </p:txBody>
@@ -1844,7 +1477,7 @@
     </p:spTree>
     <p:extLst>
       <p:ext uri="{BB962C8B-B14F-4D97-AF65-F5344CB8AC3E}">
-        <p14:creationId xmlns:p14="http://schemas.microsoft.com/office/powerpoint/2010/main" val="50511374"/>
+        <ns2:creationId val="50511374"/>
       </p:ext>
     </p:extLst>
   </p:cSld>
@@ -1855,7 +1488,7 @@
 </file>
 
 <file path=ppt/slideLayouts/slideLayout12.xml><?xml version="1.0" encoding="utf-8"?>
-<p:sldLayout xmlns:a="http://schemas.openxmlformats.org/drawingml/2006/main" xmlns:r="http://schemas.openxmlformats.org/officeDocument/2006/relationships" xmlns:p="http://schemas.openxmlformats.org/presentationml/2006/main" showMasterPhAnim="0" userDrawn="1">
+<p:sldLayout xmlns:p="http://schemas.openxmlformats.org/presentationml/2006/main" xmlns:a="http://schemas.openxmlformats.org/drawingml/2006/main" xmlns:ns1="http://schemas.microsoft.com/office/drawing/2014/main" xmlns:ns2="http://schemas.microsoft.com/office/powerpoint/2010/main" showMasterPhAnim="0" userDrawn="1">
   <p:cSld name="Основной 6">
     <p:spTree>
       <p:nvGrpSpPr>
@@ -1871,48 +1504,12 @@
           <a:chExt cx="0" cy="0"/>
         </a:xfrm>
       </p:grpSpPr>
-      <p:pic>
-        <p:nvPicPr>
-          <p:cNvPr id="4" name="Рисунок 3">
-            <a:extLst>
-              <a:ext uri="{FF2B5EF4-FFF2-40B4-BE49-F238E27FC236}">
-                <a16:creationId xmlns:a16="http://schemas.microsoft.com/office/drawing/2014/main" id="{7F13B087-C98F-F581-9E4B-21A8DD7BD8D9}"/>
-              </a:ext>
-            </a:extLst>
-          </p:cNvPr>
-          <p:cNvPicPr>
-            <a:picLocks noChangeAspect="1"/>
-          </p:cNvPicPr>
-          <p:nvPr userDrawn="1"/>
-        </p:nvPicPr>
-        <p:blipFill>
-          <a:blip r:embed="rId2" cstate="screen">
-            <a:extLst>
-              <a:ext uri="{28A0092B-C50C-407E-A947-70E740481C1C}">
-                <a14:useLocalDpi xmlns:a14="http://schemas.microsoft.com/office/drawing/2010/main"/>
-              </a:ext>
-            </a:extLst>
-          </a:blip>
-          <a:stretch>
-            <a:fillRect/>
-          </a:stretch>
-        </p:blipFill>
-        <p:spPr>
-          <a:xfrm>
-            <a:off x="0" y="0"/>
-            <a:ext cx="12192000" cy="6858000"/>
-          </a:xfrm>
-          <a:prstGeom prst="rect">
-            <a:avLst/>
-          </a:prstGeom>
-        </p:spPr>
-      </p:pic>
       <p:sp>
         <p:nvSpPr>
           <p:cNvPr id="2" name="Заголовок 6">
             <a:extLst>
               <a:ext uri="{FF2B5EF4-FFF2-40B4-BE49-F238E27FC236}">
-                <a16:creationId xmlns:a16="http://schemas.microsoft.com/office/drawing/2014/main" id="{CC338813-3B69-E4E1-1159-04776C22401F}"/>
+                <ns1:creationId id="{CC338813-3B69-E4E1-1159-04776C22401F}"/>
               </a:ext>
             </a:extLst>
           </p:cNvPr>
@@ -1953,7 +1550,7 @@
             <a:pPr marL="0" lvl="0"/>
             <a:r>
               <a:rPr lang="ru-RU" dirty="0"/>
-              <a:t>Образец заголовка</a:t>
+              <a:t/>
             </a:r>
           </a:p>
         </p:txBody>
@@ -1963,7 +1560,7 @@
           <p:cNvPr id="3" name="Текст 9">
             <a:extLst>
               <a:ext uri="{FF2B5EF4-FFF2-40B4-BE49-F238E27FC236}">
-                <a16:creationId xmlns:a16="http://schemas.microsoft.com/office/drawing/2014/main" id="{9FE2A5E8-12A0-4B65-8377-3712193ED359}"/>
+                <ns1:creationId id="{9FE2A5E8-12A0-4B65-8377-3712193ED359}"/>
               </a:ext>
             </a:extLst>
           </p:cNvPr>
@@ -2004,7 +1601,7 @@
             <a:pPr marL="0" lvl="0"/>
             <a:r>
               <a:rPr lang="ru-RU" dirty="0"/>
-              <a:t>Образец подзаголовка</a:t>
+              <a:t/>
             </a:r>
           </a:p>
         </p:txBody>
@@ -2012,7 +1609,7 @@
     </p:spTree>
     <p:extLst>
       <p:ext uri="{BB962C8B-B14F-4D97-AF65-F5344CB8AC3E}">
-        <p14:creationId xmlns:p14="http://schemas.microsoft.com/office/powerpoint/2010/main" val="2761834550"/>
+        <ns2:creationId val="2761834550"/>
       </p:ext>
     </p:extLst>
   </p:cSld>
@@ -2023,7 +1620,7 @@
 </file>
 
 <file path=ppt/slideLayouts/slideLayout13.xml><?xml version="1.0" encoding="utf-8"?>
-<p:sldLayout xmlns:a="http://schemas.openxmlformats.org/drawingml/2006/main" xmlns:r="http://schemas.openxmlformats.org/officeDocument/2006/relationships" xmlns:p="http://schemas.openxmlformats.org/presentationml/2006/main" userDrawn="1">
+<p:sldLayout xmlns:p="http://schemas.openxmlformats.org/presentationml/2006/main" xmlns:a="http://schemas.openxmlformats.org/drawingml/2006/main" xmlns:ns3="http://schemas.microsoft.com/office/powerpoint/2010/main" xmlns:ns4="http://schemas.microsoft.com/office/powerpoint/2012/main" userDrawn="1">
   <p:cSld name="Дополнительный 1">
     <p:spTree>
       <p:nvGrpSpPr>
@@ -2039,118 +1636,10 @@
           <a:chExt cx="0" cy="0"/>
         </a:xfrm>
       </p:grpSpPr>
-      <p:pic>
-        <p:nvPicPr>
-          <p:cNvPr id="3" name="Рисунок 2">
-            <a:extLst>
-              <a:ext uri="{FF2B5EF4-FFF2-40B4-BE49-F238E27FC236}">
-                <a16:creationId xmlns:a16="http://schemas.microsoft.com/office/drawing/2014/main" id="{4A4B73F8-5E86-5C16-6BEA-31F662505842}"/>
-              </a:ext>
-            </a:extLst>
-          </p:cNvPr>
-          <p:cNvPicPr>
-            <a:picLocks noChangeAspect="1"/>
-          </p:cNvPicPr>
-          <p:nvPr userDrawn="1"/>
-        </p:nvPicPr>
-        <p:blipFill>
-          <a:blip r:embed="rId2" cstate="screen">
-            <a:extLst>
-              <a:ext uri="{28A0092B-C50C-407E-A947-70E740481C1C}">
-                <a14:useLocalDpi xmlns:a14="http://schemas.microsoft.com/office/drawing/2010/main"/>
-              </a:ext>
-            </a:extLst>
-          </a:blip>
-          <a:stretch>
-            <a:fillRect/>
-          </a:stretch>
-        </p:blipFill>
-        <p:spPr>
-          <a:xfrm>
-            <a:off x="0" y="0"/>
-            <a:ext cx="12192000" cy="6858000"/>
-          </a:xfrm>
-          <a:prstGeom prst="rect">
-            <a:avLst/>
-          </a:prstGeom>
-        </p:spPr>
-      </p:pic>
-      <p:pic>
-        <p:nvPicPr>
-          <p:cNvPr id="6" name="Рисунок 5">
-            <a:extLst>
-              <a:ext uri="{FF2B5EF4-FFF2-40B4-BE49-F238E27FC236}">
-                <a16:creationId xmlns:a16="http://schemas.microsoft.com/office/drawing/2014/main" id="{E77FF82C-DCC2-4F84-723F-63D29D81557F}"/>
-              </a:ext>
-            </a:extLst>
-          </p:cNvPr>
-          <p:cNvPicPr>
-            <a:picLocks noChangeAspect="1"/>
-          </p:cNvPicPr>
-          <p:nvPr userDrawn="1"/>
-        </p:nvPicPr>
-        <p:blipFill>
-          <a:blip r:embed="rId3" cstate="screen">
-            <a:extLst>
-              <a:ext uri="{28A0092B-C50C-407E-A947-70E740481C1C}">
-                <a14:useLocalDpi xmlns:a14="http://schemas.microsoft.com/office/drawing/2010/main"/>
-              </a:ext>
-            </a:extLst>
-          </a:blip>
-          <a:stretch>
-            <a:fillRect/>
-          </a:stretch>
-        </p:blipFill>
-        <p:spPr>
-          <a:xfrm>
-            <a:off x="0" y="0"/>
-            <a:ext cx="12192000" cy="6858000"/>
-          </a:xfrm>
-          <a:prstGeom prst="rect">
-            <a:avLst/>
-          </a:prstGeom>
-        </p:spPr>
-      </p:pic>
-      <p:pic>
-        <p:nvPicPr>
-          <p:cNvPr id="2" name="Рисунок 1">
-            <a:extLst>
-              <a:ext uri="{FF2B5EF4-FFF2-40B4-BE49-F238E27FC236}">
-                <a16:creationId xmlns:a16="http://schemas.microsoft.com/office/drawing/2014/main" id="{64DF899A-2219-2D98-E894-87FA47DEBFC2}"/>
-              </a:ext>
-            </a:extLst>
-          </p:cNvPr>
-          <p:cNvPicPr>
-            <a:picLocks noChangeAspect="1"/>
-          </p:cNvPicPr>
-          <p:nvPr userDrawn="1"/>
-        </p:nvPicPr>
-        <p:blipFill>
-          <a:blip r:embed="rId4" cstate="screen">
-            <a:extLst>
-              <a:ext uri="{28A0092B-C50C-407E-A947-70E740481C1C}">
-                <a14:useLocalDpi xmlns:a14="http://schemas.microsoft.com/office/drawing/2010/main"/>
-              </a:ext>
-            </a:extLst>
-          </a:blip>
-          <a:stretch>
-            <a:fillRect/>
-          </a:stretch>
-        </p:blipFill>
-        <p:spPr bwMode="auto">
-          <a:xfrm>
-            <a:off x="494001" y="303628"/>
-            <a:ext cx="1420524" cy="226197"/>
-          </a:xfrm>
-          <a:prstGeom prst="rect">
-            <a:avLst/>
-          </a:prstGeom>
-        </p:spPr>
-      </p:pic>
     </p:spTree>
     <p:extLst>
       <p:ext uri="{BB962C8B-B14F-4D97-AF65-F5344CB8AC3E}">
-        <p14:creationId xmlns:p14="http://schemas.microsoft.com/office/powerpoint/2010/main" val="612429082"/>
+        <ns3:creationId val="612429082"/>
       </p:ext>
     </p:extLst>
   </p:cSld>
@@ -2159,20 +1648,20 @@
   </p:clrMapOvr>
   <p:extLst>
     <p:ext uri="{DCECCB84-F9BA-43D5-87BE-67443E8EF086}">
-      <p15:sldGuideLst xmlns:p15="http://schemas.microsoft.com/office/powerpoint/2012/main">
-        <p15:guide id="4" orient="horz" pos="278">
-          <p15:clr>
+      <ns4:sldGuideLst>
+        <ns4:guide id="4" orient="horz" pos="278">
+          <ns4:clr>
             <a:srgbClr val="FBAE40"/>
-          </p15:clr>
-        </p15:guide>
-      </p15:sldGuideLst>
+          </ns4:clr>
+        </ns4:guide>
+      </ns4:sldGuideLst>
     </p:ext>
   </p:extLst>
 </p:sldLayout>
 </file>
 
 <file path=ppt/slideLayouts/slideLayout14.xml><?xml version="1.0" encoding="utf-8"?>
-<p:sldLayout xmlns:a="http://schemas.openxmlformats.org/drawingml/2006/main" xmlns:r="http://schemas.openxmlformats.org/officeDocument/2006/relationships" xmlns:p="http://schemas.openxmlformats.org/presentationml/2006/main" userDrawn="1">
+<p:sldLayout xmlns:p="http://schemas.openxmlformats.org/presentationml/2006/main" xmlns:a="http://schemas.openxmlformats.org/drawingml/2006/main" xmlns:ns3="http://schemas.microsoft.com/office/powerpoint/2010/main" xmlns:ns4="http://schemas.microsoft.com/office/powerpoint/2012/main" userDrawn="1">
   <p:cSld name="Дополнительный 2">
     <p:spTree>
       <p:nvGrpSpPr>
@@ -2188,82 +1677,10 @@
           <a:chExt cx="0" cy="0"/>
         </a:xfrm>
       </p:grpSpPr>
-      <p:pic>
-        <p:nvPicPr>
-          <p:cNvPr id="10" name="Рисунок 9">
-            <a:extLst>
-              <a:ext uri="{FF2B5EF4-FFF2-40B4-BE49-F238E27FC236}">
-                <a16:creationId xmlns:a16="http://schemas.microsoft.com/office/drawing/2014/main" id="{A056ADC3-7E69-6752-3D8E-0DF856175747}"/>
-              </a:ext>
-            </a:extLst>
-          </p:cNvPr>
-          <p:cNvPicPr>
-            <a:picLocks noChangeAspect="1"/>
-          </p:cNvPicPr>
-          <p:nvPr userDrawn="1"/>
-        </p:nvPicPr>
-        <p:blipFill>
-          <a:blip r:embed="rId2" cstate="screen">
-            <a:extLst>
-              <a:ext uri="{28A0092B-C50C-407E-A947-70E740481C1C}">
-                <a14:useLocalDpi xmlns:a14="http://schemas.microsoft.com/office/drawing/2010/main"/>
-              </a:ext>
-            </a:extLst>
-          </a:blip>
-          <a:stretch>
-            <a:fillRect/>
-          </a:stretch>
-        </p:blipFill>
-        <p:spPr>
-          <a:xfrm>
-            <a:off x="0" y="0"/>
-            <a:ext cx="12192000" cy="6858000"/>
-          </a:xfrm>
-          <a:prstGeom prst="rect">
-            <a:avLst/>
-          </a:prstGeom>
-        </p:spPr>
-      </p:pic>
-      <p:pic>
-        <p:nvPicPr>
-          <p:cNvPr id="2" name="Рисунок 1">
-            <a:extLst>
-              <a:ext uri="{FF2B5EF4-FFF2-40B4-BE49-F238E27FC236}">
-                <a16:creationId xmlns:a16="http://schemas.microsoft.com/office/drawing/2014/main" id="{39628681-8C08-D824-A185-B92BBE64BFA5}"/>
-              </a:ext>
-            </a:extLst>
-          </p:cNvPr>
-          <p:cNvPicPr>
-            <a:picLocks noChangeAspect="1"/>
-          </p:cNvPicPr>
-          <p:nvPr userDrawn="1"/>
-        </p:nvPicPr>
-        <p:blipFill>
-          <a:blip r:embed="rId3" cstate="screen">
-            <a:extLst>
-              <a:ext uri="{28A0092B-C50C-407E-A947-70E740481C1C}">
-                <a14:useLocalDpi xmlns:a14="http://schemas.microsoft.com/office/drawing/2010/main"/>
-              </a:ext>
-            </a:extLst>
-          </a:blip>
-          <a:stretch>
-            <a:fillRect/>
-          </a:stretch>
-        </p:blipFill>
-        <p:spPr bwMode="auto">
-          <a:xfrm>
-            <a:off x="494001" y="303628"/>
-            <a:ext cx="1420524" cy="226197"/>
-          </a:xfrm>
-          <a:prstGeom prst="rect">
-            <a:avLst/>
-          </a:prstGeom>
-        </p:spPr>
-      </p:pic>
     </p:spTree>
     <p:extLst>
       <p:ext uri="{BB962C8B-B14F-4D97-AF65-F5344CB8AC3E}">
-        <p14:creationId xmlns:p14="http://schemas.microsoft.com/office/powerpoint/2010/main" val="4147163352"/>
+        <ns3:creationId val="4147163352"/>
       </p:ext>
     </p:extLst>
   </p:cSld>
@@ -2272,20 +1689,20 @@
   </p:clrMapOvr>
   <p:extLst>
     <p:ext uri="{DCECCB84-F9BA-43D5-87BE-67443E8EF086}">
-      <p15:sldGuideLst xmlns:p15="http://schemas.microsoft.com/office/powerpoint/2012/main">
-        <p15:guide id="4" orient="horz" pos="278">
-          <p15:clr>
+      <ns4:sldGuideLst>
+        <ns4:guide id="4" orient="horz" pos="278">
+          <ns4:clr>
             <a:srgbClr val="FBAE40"/>
-          </p15:clr>
-        </p15:guide>
-      </p15:sldGuideLst>
+          </ns4:clr>
+        </ns4:guide>
+      </ns4:sldGuideLst>
     </p:ext>
   </p:extLst>
 </p:sldLayout>
 </file>
 
 <file path=ppt/slideLayouts/slideLayout15.xml><?xml version="1.0" encoding="utf-8"?>
-<p:sldLayout xmlns:a="http://schemas.openxmlformats.org/drawingml/2006/main" xmlns:r="http://schemas.openxmlformats.org/officeDocument/2006/relationships" xmlns:p="http://schemas.openxmlformats.org/presentationml/2006/main" userDrawn="1">
+<p:sldLayout xmlns:p="http://schemas.openxmlformats.org/presentationml/2006/main" xmlns:a="http://schemas.openxmlformats.org/drawingml/2006/main" xmlns:ns3="http://schemas.microsoft.com/office/powerpoint/2010/main" xmlns:ns4="http://schemas.microsoft.com/office/powerpoint/2012/main" userDrawn="1">
   <p:cSld name="Дополнительный 3">
     <p:spTree>
       <p:nvGrpSpPr>
@@ -2301,81 +1718,10 @@
           <a:chExt cx="0" cy="0"/>
         </a:xfrm>
       </p:grpSpPr>
-      <p:pic>
-        <p:nvPicPr>
-          <p:cNvPr id="3" name="Рисунок 2">
-            <a:extLst>
-              <a:ext uri="{FF2B5EF4-FFF2-40B4-BE49-F238E27FC236}">
-                <a16:creationId xmlns:a16="http://schemas.microsoft.com/office/drawing/2014/main" id="{279B1664-9B40-40D2-9C62-E929AD95A078}"/>
-              </a:ext>
-            </a:extLst>
-          </p:cNvPr>
-          <p:cNvPicPr>
-            <a:picLocks noChangeAspect="1"/>
-          </p:cNvPicPr>
-          <p:nvPr userDrawn="1"/>
-        </p:nvPicPr>
-        <p:blipFill>
-          <a:blip r:embed="rId2" cstate="screen">
-            <a:extLst>
-              <a:ext uri="{28A0092B-C50C-407E-A947-70E740481C1C}">
-                <a14:useLocalDpi xmlns:a14="http://schemas.microsoft.com/office/drawing/2010/main"/>
-              </a:ext>
-            </a:extLst>
-          </a:blip>
-          <a:srcRect/>
-          <a:stretch/>
-        </p:blipFill>
-        <p:spPr>
-          <a:xfrm>
-            <a:off x="0" y="1"/>
-            <a:ext cx="12207978" cy="6858000"/>
-          </a:xfrm>
-          <a:prstGeom prst="rect">
-            <a:avLst/>
-          </a:prstGeom>
-        </p:spPr>
-      </p:pic>
-      <p:pic>
-        <p:nvPicPr>
-          <p:cNvPr id="2" name="Рисунок 1">
-            <a:extLst>
-              <a:ext uri="{FF2B5EF4-FFF2-40B4-BE49-F238E27FC236}">
-                <a16:creationId xmlns:a16="http://schemas.microsoft.com/office/drawing/2014/main" id="{5335A154-0F39-261B-1114-8A64D314A1E0}"/>
-              </a:ext>
-            </a:extLst>
-          </p:cNvPr>
-          <p:cNvPicPr>
-            <a:picLocks noChangeAspect="1"/>
-          </p:cNvPicPr>
-          <p:nvPr userDrawn="1"/>
-        </p:nvPicPr>
-        <p:blipFill>
-          <a:blip r:embed="rId3" cstate="screen">
-            <a:extLst>
-              <a:ext uri="{28A0092B-C50C-407E-A947-70E740481C1C}">
-                <a14:useLocalDpi xmlns:a14="http://schemas.microsoft.com/office/drawing/2010/main"/>
-              </a:ext>
-            </a:extLst>
-          </a:blip>
-          <a:stretch>
-            <a:fillRect/>
-          </a:stretch>
-        </p:blipFill>
-        <p:spPr bwMode="auto">
-          <a:xfrm>
-            <a:off x="494001" y="303628"/>
-            <a:ext cx="1420524" cy="226197"/>
-          </a:xfrm>
-          <a:prstGeom prst="rect">
-            <a:avLst/>
-          </a:prstGeom>
-        </p:spPr>
-      </p:pic>
     </p:spTree>
     <p:extLst>
       <p:ext uri="{BB962C8B-B14F-4D97-AF65-F5344CB8AC3E}">
-        <p14:creationId xmlns:p14="http://schemas.microsoft.com/office/powerpoint/2010/main" val="1698953900"/>
+        <ns3:creationId val="1698953900"/>
       </p:ext>
     </p:extLst>
   </p:cSld>
@@ -2384,14 +1730,14 @@
   </p:clrMapOvr>
   <p:extLst>
     <p:ext uri="{DCECCB84-F9BA-43D5-87BE-67443E8EF086}">
-      <p15:sldGuideLst xmlns:p15="http://schemas.microsoft.com/office/powerpoint/2012/main"/>
+      <ns4:sldGuideLst/>
     </p:ext>
   </p:extLst>
 </p:sldLayout>
 </file>
 
 <file path=ppt/slideLayouts/slideLayout16.xml><?xml version="1.0" encoding="utf-8"?>
-<p:sldLayout xmlns:a="http://schemas.openxmlformats.org/drawingml/2006/main" xmlns:r="http://schemas.openxmlformats.org/officeDocument/2006/relationships" xmlns:p="http://schemas.openxmlformats.org/presentationml/2006/main" userDrawn="1">
+<p:sldLayout xmlns:p="http://schemas.openxmlformats.org/presentationml/2006/main" xmlns:a="http://schemas.openxmlformats.org/drawingml/2006/main" xmlns:ns3="http://schemas.microsoft.com/office/powerpoint/2010/main" xmlns:ns4="http://schemas.microsoft.com/office/powerpoint/2012/main" userDrawn="1">
   <p:cSld name="Дополнительный 4">
     <p:spTree>
       <p:nvGrpSpPr>
@@ -2407,81 +1753,10 @@
           <a:chExt cx="0" cy="0"/>
         </a:xfrm>
       </p:grpSpPr>
-      <p:pic>
-        <p:nvPicPr>
-          <p:cNvPr id="4" name="Рисунок 3">
-            <a:extLst>
-              <a:ext uri="{FF2B5EF4-FFF2-40B4-BE49-F238E27FC236}">
-                <a16:creationId xmlns:a16="http://schemas.microsoft.com/office/drawing/2014/main" id="{95355CC3-975C-1E92-533D-579F39BE35D7}"/>
-              </a:ext>
-            </a:extLst>
-          </p:cNvPr>
-          <p:cNvPicPr>
-            <a:picLocks noChangeAspect="1"/>
-          </p:cNvPicPr>
-          <p:nvPr userDrawn="1"/>
-        </p:nvPicPr>
-        <p:blipFill>
-          <a:blip r:embed="rId2" cstate="screen">
-            <a:extLst>
-              <a:ext uri="{28A0092B-C50C-407E-A947-70E740481C1C}">
-                <a14:useLocalDpi xmlns:a14="http://schemas.microsoft.com/office/drawing/2010/main"/>
-              </a:ext>
-            </a:extLst>
-          </a:blip>
-          <a:srcRect/>
-          <a:stretch/>
-        </p:blipFill>
-        <p:spPr>
-          <a:xfrm flipV="1">
-            <a:off x="0" y="0"/>
-            <a:ext cx="12192000" cy="6858000"/>
-          </a:xfrm>
-          <a:prstGeom prst="rect">
-            <a:avLst/>
-          </a:prstGeom>
-        </p:spPr>
-      </p:pic>
-      <p:pic>
-        <p:nvPicPr>
-          <p:cNvPr id="2" name="Рисунок 1">
-            <a:extLst>
-              <a:ext uri="{FF2B5EF4-FFF2-40B4-BE49-F238E27FC236}">
-                <a16:creationId xmlns:a16="http://schemas.microsoft.com/office/drawing/2014/main" id="{ED309647-75E7-B829-4423-32D51ACD4E94}"/>
-              </a:ext>
-            </a:extLst>
-          </p:cNvPr>
-          <p:cNvPicPr>
-            <a:picLocks noChangeAspect="1"/>
-          </p:cNvPicPr>
-          <p:nvPr userDrawn="1"/>
-        </p:nvPicPr>
-        <p:blipFill>
-          <a:blip r:embed="rId3" cstate="screen">
-            <a:extLst>
-              <a:ext uri="{28A0092B-C50C-407E-A947-70E740481C1C}">
-                <a14:useLocalDpi xmlns:a14="http://schemas.microsoft.com/office/drawing/2010/main"/>
-              </a:ext>
-            </a:extLst>
-          </a:blip>
-          <a:stretch>
-            <a:fillRect/>
-          </a:stretch>
-        </p:blipFill>
-        <p:spPr bwMode="auto">
-          <a:xfrm>
-            <a:off x="494001" y="303628"/>
-            <a:ext cx="1420524" cy="226197"/>
-          </a:xfrm>
-          <a:prstGeom prst="rect">
-            <a:avLst/>
-          </a:prstGeom>
-        </p:spPr>
-      </p:pic>
     </p:spTree>
     <p:extLst>
       <p:ext uri="{BB962C8B-B14F-4D97-AF65-F5344CB8AC3E}">
-        <p14:creationId xmlns:p14="http://schemas.microsoft.com/office/powerpoint/2010/main" val="1628111941"/>
+        <ns3:creationId val="1628111941"/>
       </p:ext>
     </p:extLst>
   </p:cSld>
@@ -2490,14 +1765,14 @@
   </p:clrMapOvr>
   <p:extLst>
     <p:ext uri="{DCECCB84-F9BA-43D5-87BE-67443E8EF086}">
-      <p15:sldGuideLst xmlns:p15="http://schemas.microsoft.com/office/powerpoint/2012/main"/>
+      <ns4:sldGuideLst/>
     </p:ext>
   </p:extLst>
 </p:sldLayout>
 </file>
 
 <file path=ppt/slideLayouts/slideLayout17.xml><?xml version="1.0" encoding="utf-8"?>
-<p:sldLayout xmlns:a="http://schemas.openxmlformats.org/drawingml/2006/main" xmlns:r="http://schemas.openxmlformats.org/officeDocument/2006/relationships" xmlns:p="http://schemas.openxmlformats.org/presentationml/2006/main" userDrawn="1">
+<p:sldLayout xmlns:p="http://schemas.openxmlformats.org/presentationml/2006/main" xmlns:a="http://schemas.openxmlformats.org/drawingml/2006/main" xmlns:ns3="http://schemas.microsoft.com/office/powerpoint/2010/main" xmlns:ns4="http://schemas.microsoft.com/office/powerpoint/2012/main" userDrawn="1">
   <p:cSld name="Дополнительный 5">
     <p:spTree>
       <p:nvGrpSpPr>
@@ -2513,82 +1788,10 @@
           <a:chExt cx="0" cy="0"/>
         </a:xfrm>
       </p:grpSpPr>
-      <p:pic>
-        <p:nvPicPr>
-          <p:cNvPr id="3" name="Рисунок 2">
-            <a:extLst>
-              <a:ext uri="{FF2B5EF4-FFF2-40B4-BE49-F238E27FC236}">
-                <a16:creationId xmlns:a16="http://schemas.microsoft.com/office/drawing/2014/main" id="{1A8B7479-BEEB-92A0-2D09-6906034BD62A}"/>
-              </a:ext>
-            </a:extLst>
-          </p:cNvPr>
-          <p:cNvPicPr>
-            <a:picLocks noChangeAspect="1"/>
-          </p:cNvPicPr>
-          <p:nvPr userDrawn="1"/>
-        </p:nvPicPr>
-        <p:blipFill>
-          <a:blip r:embed="rId2" cstate="screen">
-            <a:extLst>
-              <a:ext uri="{28A0092B-C50C-407E-A947-70E740481C1C}">
-                <a14:useLocalDpi xmlns:a14="http://schemas.microsoft.com/office/drawing/2010/main"/>
-              </a:ext>
-            </a:extLst>
-          </a:blip>
-          <a:stretch>
-            <a:fillRect/>
-          </a:stretch>
-        </p:blipFill>
-        <p:spPr>
-          <a:xfrm>
-            <a:off x="0" y="0"/>
-            <a:ext cx="12192000" cy="6858000"/>
-          </a:xfrm>
-          <a:prstGeom prst="rect">
-            <a:avLst/>
-          </a:prstGeom>
-        </p:spPr>
-      </p:pic>
-      <p:pic>
-        <p:nvPicPr>
-          <p:cNvPr id="2" name="Рисунок 1">
-            <a:extLst>
-              <a:ext uri="{FF2B5EF4-FFF2-40B4-BE49-F238E27FC236}">
-                <a16:creationId xmlns:a16="http://schemas.microsoft.com/office/drawing/2014/main" id="{48060692-8FF2-9CA7-1AE2-F247A7E0AD62}"/>
-              </a:ext>
-            </a:extLst>
-          </p:cNvPr>
-          <p:cNvPicPr>
-            <a:picLocks noChangeAspect="1"/>
-          </p:cNvPicPr>
-          <p:nvPr userDrawn="1"/>
-        </p:nvPicPr>
-        <p:blipFill>
-          <a:blip r:embed="rId3" cstate="screen">
-            <a:extLst>
-              <a:ext uri="{28A0092B-C50C-407E-A947-70E740481C1C}">
-                <a14:useLocalDpi xmlns:a14="http://schemas.microsoft.com/office/drawing/2010/main"/>
-              </a:ext>
-            </a:extLst>
-          </a:blip>
-          <a:stretch>
-            <a:fillRect/>
-          </a:stretch>
-        </p:blipFill>
-        <p:spPr bwMode="auto">
-          <a:xfrm>
-            <a:off x="494001" y="303628"/>
-            <a:ext cx="1420524" cy="226197"/>
-          </a:xfrm>
-          <a:prstGeom prst="rect">
-            <a:avLst/>
-          </a:prstGeom>
-        </p:spPr>
-      </p:pic>
     </p:spTree>
     <p:extLst>
       <p:ext uri="{BB962C8B-B14F-4D97-AF65-F5344CB8AC3E}">
-        <p14:creationId xmlns:p14="http://schemas.microsoft.com/office/powerpoint/2010/main" val="997266264"/>
+        <ns3:creationId val="997266264"/>
       </p:ext>
     </p:extLst>
   </p:cSld>
@@ -2597,20 +1800,20 @@
   </p:clrMapOvr>
   <p:extLst>
     <p:ext uri="{DCECCB84-F9BA-43D5-87BE-67443E8EF086}">
-      <p15:sldGuideLst xmlns:p15="http://schemas.microsoft.com/office/powerpoint/2012/main">
-        <p15:guide id="4" orient="horz" pos="278">
-          <p15:clr>
+      <ns4:sldGuideLst>
+        <ns4:guide id="4" orient="horz" pos="278">
+          <ns4:clr>
             <a:srgbClr val="FBAE40"/>
-          </p15:clr>
-        </p15:guide>
-      </p15:sldGuideLst>
+          </ns4:clr>
+        </ns4:guide>
+      </ns4:sldGuideLst>
     </p:ext>
   </p:extLst>
 </p:sldLayout>
 </file>
 
 <file path=ppt/slideLayouts/slideLayout18.xml><?xml version="1.0" encoding="utf-8"?>
-<p:sldLayout xmlns:a="http://schemas.openxmlformats.org/drawingml/2006/main" xmlns:r="http://schemas.openxmlformats.org/officeDocument/2006/relationships" xmlns:p="http://schemas.openxmlformats.org/presentationml/2006/main" userDrawn="1">
+<p:sldLayout xmlns:p="http://schemas.openxmlformats.org/presentationml/2006/main" xmlns:a="http://schemas.openxmlformats.org/drawingml/2006/main" xmlns:ns1="http://schemas.microsoft.com/office/drawing/2014/main" xmlns:ns3="http://schemas.microsoft.com/office/powerpoint/2010/main" xmlns:ns4="http://schemas.microsoft.com/office/powerpoint/2012/main" userDrawn="1">
   <p:cSld name="Дополнительный 6">
     <p:spTree>
       <p:nvGrpSpPr>
@@ -2626,48 +1829,12 @@
           <a:chExt cx="0" cy="0"/>
         </a:xfrm>
       </p:grpSpPr>
-      <p:pic>
-        <p:nvPicPr>
-          <p:cNvPr id="6" name="Рисунок 5">
-            <a:extLst>
-              <a:ext uri="{FF2B5EF4-FFF2-40B4-BE49-F238E27FC236}">
-                <a16:creationId xmlns:a16="http://schemas.microsoft.com/office/drawing/2014/main" id="{BD02D9FD-D999-CC10-052A-CE895ADB0933}"/>
-              </a:ext>
-            </a:extLst>
-          </p:cNvPr>
-          <p:cNvPicPr>
-            <a:picLocks noChangeAspect="1"/>
-          </p:cNvPicPr>
-          <p:nvPr userDrawn="1"/>
-        </p:nvPicPr>
-        <p:blipFill>
-          <a:blip r:embed="rId2" cstate="screen">
-            <a:extLst>
-              <a:ext uri="{28A0092B-C50C-407E-A947-70E740481C1C}">
-                <a14:useLocalDpi xmlns:a14="http://schemas.microsoft.com/office/drawing/2010/main"/>
-              </a:ext>
-            </a:extLst>
-          </a:blip>
-          <a:stretch>
-            <a:fillRect/>
-          </a:stretch>
-        </p:blipFill>
-        <p:spPr>
-          <a:xfrm>
-            <a:off x="0" y="0"/>
-            <a:ext cx="12192000" cy="6858000"/>
-          </a:xfrm>
-          <a:prstGeom prst="rect">
-            <a:avLst/>
-          </a:prstGeom>
-        </p:spPr>
-      </p:pic>
       <p:sp>
         <p:nvSpPr>
           <p:cNvPr id="2" name="Заголовок 6">
             <a:extLst>
               <a:ext uri="{FF2B5EF4-FFF2-40B4-BE49-F238E27FC236}">
-                <a16:creationId xmlns:a16="http://schemas.microsoft.com/office/drawing/2014/main" id="{0A67D587-5E3E-FF7B-E60A-4EEB5B04C18C}"/>
+                <ns1:creationId id="{0A67D587-5E3E-FF7B-E60A-4EEB5B04C18C}"/>
               </a:ext>
             </a:extLst>
           </p:cNvPr>
@@ -2708,7 +1875,7 @@
             <a:pPr marL="0" lvl="0"/>
             <a:r>
               <a:rPr lang="ru-RU" dirty="0"/>
-              <a:t>Образец заголовка</a:t>
+              <a:t/>
             </a:r>
           </a:p>
         </p:txBody>
@@ -2718,7 +1885,7 @@
           <p:cNvPr id="3" name="Текст 9">
             <a:extLst>
               <a:ext uri="{FF2B5EF4-FFF2-40B4-BE49-F238E27FC236}">
-                <a16:creationId xmlns:a16="http://schemas.microsoft.com/office/drawing/2014/main" id="{5CF7202C-08B6-6059-FD2B-A5DE1C0F3AD6}"/>
+                <ns1:creationId id="{5CF7202C-08B6-6059-FD2B-A5DE1C0F3AD6}"/>
               </a:ext>
             </a:extLst>
           </p:cNvPr>
@@ -2759,51 +1926,15 @@
             <a:pPr marL="0" lvl="0"/>
             <a:r>
               <a:rPr lang="ru-RU" dirty="0"/>
-              <a:t>Образец подзаголовка</a:t>
+              <a:t/>
             </a:r>
           </a:p>
         </p:txBody>
       </p:sp>
-      <p:pic>
-        <p:nvPicPr>
-          <p:cNvPr id="4" name="Рисунок 3">
-            <a:extLst>
-              <a:ext uri="{FF2B5EF4-FFF2-40B4-BE49-F238E27FC236}">
-                <a16:creationId xmlns:a16="http://schemas.microsoft.com/office/drawing/2014/main" id="{FFA38C30-57CA-32CD-6792-C06C009058C1}"/>
-              </a:ext>
-            </a:extLst>
-          </p:cNvPr>
-          <p:cNvPicPr>
-            <a:picLocks noChangeAspect="1"/>
-          </p:cNvPicPr>
-          <p:nvPr userDrawn="1"/>
-        </p:nvPicPr>
-        <p:blipFill>
-          <a:blip r:embed="rId3" cstate="screen">
-            <a:extLst>
-              <a:ext uri="{28A0092B-C50C-407E-A947-70E740481C1C}">
-                <a14:useLocalDpi xmlns:a14="http://schemas.microsoft.com/office/drawing/2010/main"/>
-              </a:ext>
-            </a:extLst>
-          </a:blip>
-          <a:stretch>
-            <a:fillRect/>
-          </a:stretch>
-        </p:blipFill>
-        <p:spPr bwMode="auto">
-          <a:xfrm>
-            <a:off x="494001" y="303628"/>
-            <a:ext cx="1420524" cy="226197"/>
-          </a:xfrm>
-          <a:prstGeom prst="rect">
-            <a:avLst/>
-          </a:prstGeom>
-        </p:spPr>
-      </p:pic>
     </p:spTree>
     <p:extLst>
       <p:ext uri="{BB962C8B-B14F-4D97-AF65-F5344CB8AC3E}">
-        <p14:creationId xmlns:p14="http://schemas.microsoft.com/office/powerpoint/2010/main" val="3900214518"/>
+        <ns3:creationId val="3900214518"/>
       </p:ext>
     </p:extLst>
   </p:cSld>
@@ -2812,20 +1943,20 @@
   </p:clrMapOvr>
   <p:extLst>
     <p:ext uri="{DCECCB84-F9BA-43D5-87BE-67443E8EF086}">
-      <p15:sldGuideLst xmlns:p15="http://schemas.microsoft.com/office/powerpoint/2012/main">
-        <p15:guide id="4" orient="horz" pos="2092">
-          <p15:clr>
+      <ns4:sldGuideLst>
+        <ns4:guide id="4" orient="horz" pos="2092">
+          <ns4:clr>
             <a:srgbClr val="FBAE40"/>
-          </p15:clr>
-        </p15:guide>
-      </p15:sldGuideLst>
+          </ns4:clr>
+        </ns4:guide>
+      </ns4:sldGuideLst>
     </p:ext>
   </p:extLst>
 </p:sldLayout>
 </file>
 
 <file path=ppt/slideLayouts/slideLayout19.xml><?xml version="1.0" encoding="utf-8"?>
-<p:sldLayout xmlns:a="http://schemas.openxmlformats.org/drawingml/2006/main" xmlns:r="http://schemas.openxmlformats.org/officeDocument/2006/relationships" xmlns:p="http://schemas.openxmlformats.org/presentationml/2006/main" userDrawn="1">
+<p:sldLayout xmlns:p="http://schemas.openxmlformats.org/presentationml/2006/main" xmlns:a="http://schemas.openxmlformats.org/drawingml/2006/main" xmlns:ns3="http://schemas.microsoft.com/office/powerpoint/2010/main" xmlns:ns4="http://schemas.microsoft.com/office/powerpoint/2012/main" userDrawn="1">
   <p:cSld name="Дополнительный 7">
     <p:spTree>
       <p:nvGrpSpPr>
@@ -2841,82 +1972,10 @@
           <a:chExt cx="0" cy="0"/>
         </a:xfrm>
       </p:grpSpPr>
-      <p:pic>
-        <p:nvPicPr>
-          <p:cNvPr id="3" name="Рисунок 2">
-            <a:extLst>
-              <a:ext uri="{FF2B5EF4-FFF2-40B4-BE49-F238E27FC236}">
-                <a16:creationId xmlns:a16="http://schemas.microsoft.com/office/drawing/2014/main" id="{5AD01C53-8D91-9492-7CF0-C0D6C80E5CEB}"/>
-              </a:ext>
-            </a:extLst>
-          </p:cNvPr>
-          <p:cNvPicPr>
-            <a:picLocks noChangeAspect="1"/>
-          </p:cNvPicPr>
-          <p:nvPr userDrawn="1"/>
-        </p:nvPicPr>
-        <p:blipFill>
-          <a:blip r:embed="rId2" cstate="screen">
-            <a:extLst>
-              <a:ext uri="{28A0092B-C50C-407E-A947-70E740481C1C}">
-                <a14:useLocalDpi xmlns:a14="http://schemas.microsoft.com/office/drawing/2010/main"/>
-              </a:ext>
-            </a:extLst>
-          </a:blip>
-          <a:stretch>
-            <a:fillRect/>
-          </a:stretch>
-        </p:blipFill>
-        <p:spPr>
-          <a:xfrm>
-            <a:off x="0" y="0"/>
-            <a:ext cx="12192000" cy="6858000"/>
-          </a:xfrm>
-          <a:prstGeom prst="rect">
-            <a:avLst/>
-          </a:prstGeom>
-        </p:spPr>
-      </p:pic>
-      <p:pic>
-        <p:nvPicPr>
-          <p:cNvPr id="2" name="Рисунок 1">
-            <a:extLst>
-              <a:ext uri="{FF2B5EF4-FFF2-40B4-BE49-F238E27FC236}">
-                <a16:creationId xmlns:a16="http://schemas.microsoft.com/office/drawing/2014/main" id="{91D2BD11-04B4-1190-639D-50CAE3C3BD17}"/>
-              </a:ext>
-            </a:extLst>
-          </p:cNvPr>
-          <p:cNvPicPr>
-            <a:picLocks noChangeAspect="1"/>
-          </p:cNvPicPr>
-          <p:nvPr userDrawn="1"/>
-        </p:nvPicPr>
-        <p:blipFill>
-          <a:blip r:embed="rId3" cstate="screen">
-            <a:extLst>
-              <a:ext uri="{28A0092B-C50C-407E-A947-70E740481C1C}">
-                <a14:useLocalDpi xmlns:a14="http://schemas.microsoft.com/office/drawing/2010/main"/>
-              </a:ext>
-            </a:extLst>
-          </a:blip>
-          <a:stretch>
-            <a:fillRect/>
-          </a:stretch>
-        </p:blipFill>
-        <p:spPr bwMode="auto">
-          <a:xfrm>
-            <a:off x="494001" y="303628"/>
-            <a:ext cx="1420524" cy="226197"/>
-          </a:xfrm>
-          <a:prstGeom prst="rect">
-            <a:avLst/>
-          </a:prstGeom>
-        </p:spPr>
-      </p:pic>
     </p:spTree>
     <p:extLst>
       <p:ext uri="{BB962C8B-B14F-4D97-AF65-F5344CB8AC3E}">
-        <p14:creationId xmlns:p14="http://schemas.microsoft.com/office/powerpoint/2010/main" val="1242933985"/>
+        <ns3:creationId val="1242933985"/>
       </p:ext>
     </p:extLst>
   </p:cSld>
@@ -2925,20 +1984,20 @@
   </p:clrMapOvr>
   <p:extLst>
     <p:ext uri="{DCECCB84-F9BA-43D5-87BE-67443E8EF086}">
-      <p15:sldGuideLst xmlns:p15="http://schemas.microsoft.com/office/powerpoint/2012/main">
-        <p15:guide id="4" orient="horz" pos="278">
-          <p15:clr>
+      <ns4:sldGuideLst>
+        <ns4:guide id="4" orient="horz" pos="278">
+          <ns4:clr>
             <a:srgbClr val="FBAE40"/>
-          </p15:clr>
-        </p15:guide>
-      </p15:sldGuideLst>
+          </ns4:clr>
+        </ns4:guide>
+      </ns4:sldGuideLst>
     </p:ext>
   </p:extLst>
 </p:sldLayout>
 </file>
 
 <file path=ppt/slideLayouts/slideLayout2.xml><?xml version="1.0" encoding="utf-8"?>
-<p:sldLayout xmlns:a="http://schemas.openxmlformats.org/drawingml/2006/main" xmlns:r="http://schemas.openxmlformats.org/officeDocument/2006/relationships" xmlns:p="http://schemas.openxmlformats.org/presentationml/2006/main" showMasterPhAnim="0" userDrawn="1">
+<p:sldLayout xmlns:p="http://schemas.openxmlformats.org/presentationml/2006/main" xmlns:a="http://schemas.openxmlformats.org/drawingml/2006/main" xmlns:ns1="http://schemas.microsoft.com/office/drawing/2014/main" xmlns:ns2="http://schemas.microsoft.com/office/powerpoint/2010/main" xmlns:ns3="http://schemas.microsoft.com/office/powerpoint/2012/main" showMasterPhAnim="0" userDrawn="1">
   <p:cSld name="Титульный слайд">
     <p:spTree>
       <p:nvGrpSpPr>
@@ -2954,48 +2013,12 @@
           <a:chExt cx="0" cy="0"/>
         </a:xfrm>
       </p:grpSpPr>
-      <p:pic>
-        <p:nvPicPr>
-          <p:cNvPr id="5" name="Рисунок 4">
-            <a:extLst>
-              <a:ext uri="{FF2B5EF4-FFF2-40B4-BE49-F238E27FC236}">
-                <a16:creationId xmlns:a16="http://schemas.microsoft.com/office/drawing/2014/main" id="{B6B2847A-13C7-A425-0B8E-A38CFD2318E6}"/>
-              </a:ext>
-            </a:extLst>
-          </p:cNvPr>
-          <p:cNvPicPr>
-            <a:picLocks noChangeAspect="1"/>
-          </p:cNvPicPr>
-          <p:nvPr userDrawn="1"/>
-        </p:nvPicPr>
-        <p:blipFill>
-          <a:blip r:embed="rId2" cstate="screen">
-            <a:extLst>
-              <a:ext uri="{28A0092B-C50C-407E-A947-70E740481C1C}">
-                <a14:useLocalDpi xmlns:a14="http://schemas.microsoft.com/office/drawing/2010/main"/>
-              </a:ext>
-            </a:extLst>
-          </a:blip>
-          <a:stretch>
-            <a:fillRect/>
-          </a:stretch>
-        </p:blipFill>
-        <p:spPr>
-          <a:xfrm>
-            <a:off x="0" y="0"/>
-            <a:ext cx="12192000" cy="6858000"/>
-          </a:xfrm>
-          <a:prstGeom prst="rect">
-            <a:avLst/>
-          </a:prstGeom>
-        </p:spPr>
-      </p:pic>
       <p:sp>
         <p:nvSpPr>
           <p:cNvPr id="8" name="Заголовок 7">
             <a:extLst>
               <a:ext uri="{FF2B5EF4-FFF2-40B4-BE49-F238E27FC236}">
-                <a16:creationId xmlns:a16="http://schemas.microsoft.com/office/drawing/2014/main" id="{2570D549-CC0F-F7F7-1D14-D7F676FD46CE}"/>
+                <ns1:creationId id="{2570D549-CC0F-F7F7-1D14-D7F676FD46CE}"/>
               </a:ext>
             </a:extLst>
           </p:cNvPr>
@@ -3032,7 +2055,7 @@
           <a:p>
             <a:r>
               <a:rPr lang="ru-RU" dirty="0"/>
-              <a:t>Название презентации</a:t>
+              <a:t/>
             </a:r>
           </a:p>
         </p:txBody>
@@ -3042,7 +2065,7 @@
           <p:cNvPr id="11" name="Текст 10">
             <a:extLst>
               <a:ext uri="{FF2B5EF4-FFF2-40B4-BE49-F238E27FC236}">
-                <a16:creationId xmlns:a16="http://schemas.microsoft.com/office/drawing/2014/main" id="{D5E00610-EAB0-25D9-6D5B-7D11FBD8DA18}"/>
+                <ns1:creationId id="{D5E00610-EAB0-25D9-6D5B-7D11FBD8DA18}"/>
               </a:ext>
             </a:extLst>
           </p:cNvPr>
@@ -3080,7 +2103,7 @@
             <a:pPr lvl="0"/>
             <a:r>
               <a:rPr lang="ru-RU" dirty="0"/>
-              <a:t>Подзаголовок</a:t>
+              <a:t/>
             </a:r>
           </a:p>
         </p:txBody>
@@ -3088,7 +2111,7 @@
     </p:spTree>
     <p:extLst>
       <p:ext uri="{BB962C8B-B14F-4D97-AF65-F5344CB8AC3E}">
-        <p14:creationId xmlns:p14="http://schemas.microsoft.com/office/powerpoint/2010/main" val="806370381"/>
+        <ns2:creationId val="806370381"/>
       </p:ext>
     </p:extLst>
   </p:cSld>
@@ -3097,30 +2120,30 @@
   </p:clrMapOvr>
   <p:extLst>
     <p:ext uri="{DCECCB84-F9BA-43D5-87BE-67443E8EF086}">
-      <p15:sldGuideLst xmlns:p15="http://schemas.microsoft.com/office/powerpoint/2012/main">
-        <p15:guide id="1" orient="horz" pos="2183" userDrawn="1">
-          <p15:clr>
+      <ns3:sldGuideLst>
+        <ns3:guide id="1" orient="horz" pos="2183" userDrawn="1">
+          <ns3:clr>
             <a:srgbClr val="FBAE40"/>
-          </p15:clr>
-        </p15:guide>
-        <p15:guide id="2" pos="597">
-          <p15:clr>
+          </ns3:clr>
+        </ns3:guide>
+        <ns3:guide id="2" pos="597">
+          <ns3:clr>
             <a:srgbClr val="FBAE40"/>
-          </p15:clr>
-        </p15:guide>
-        <p15:guide id="3" orient="horz" pos="618" userDrawn="1">
-          <p15:clr>
+          </ns3:clr>
+        </ns3:guide>
+        <ns3:guide id="3" orient="horz" pos="618" userDrawn="1">
+          <ns3:clr>
             <a:srgbClr val="FBAE40"/>
-          </p15:clr>
-        </p15:guide>
-      </p15:sldGuideLst>
+          </ns3:clr>
+        </ns3:guide>
+      </ns3:sldGuideLst>
     </p:ext>
   </p:extLst>
 </p:sldLayout>
 </file>
 
 <file path=ppt/slideLayouts/slideLayout20.xml><?xml version="1.0" encoding="utf-8"?>
-<p:sldLayout xmlns:a="http://schemas.openxmlformats.org/drawingml/2006/main" xmlns:r="http://schemas.openxmlformats.org/officeDocument/2006/relationships" xmlns:p="http://schemas.openxmlformats.org/presentationml/2006/main" userDrawn="1">
+<p:sldLayout xmlns:p="http://schemas.openxmlformats.org/presentationml/2006/main" xmlns:a="http://schemas.openxmlformats.org/drawingml/2006/main" xmlns:ns3="http://schemas.microsoft.com/office/powerpoint/2010/main" xmlns:ns4="http://schemas.microsoft.com/office/powerpoint/2012/main" userDrawn="1">
   <p:cSld name="Дополнительный 8">
     <p:spTree>
       <p:nvGrpSpPr>
@@ -3136,76 +2159,10 @@
           <a:chExt cx="0" cy="0"/>
         </a:xfrm>
       </p:grpSpPr>
-      <p:pic>
-        <p:nvPicPr>
-          <p:cNvPr id="4" name="Рисунок 3">
-            <a:extLst>
-              <a:ext uri="{FF2B5EF4-FFF2-40B4-BE49-F238E27FC236}">
-                <a16:creationId xmlns:a16="http://schemas.microsoft.com/office/drawing/2014/main" id="{5B1F7BBB-263C-6BA2-6174-BCDA8F159D41}"/>
-              </a:ext>
-            </a:extLst>
-          </p:cNvPr>
-          <p:cNvPicPr>
-            <a:picLocks noChangeAspect="1"/>
-          </p:cNvPicPr>
-          <p:nvPr userDrawn="1"/>
-        </p:nvPicPr>
-        <p:blipFill>
-          <a:blip r:embed="rId2"/>
-          <a:stretch>
-            <a:fillRect/>
-          </a:stretch>
-        </p:blipFill>
-        <p:spPr>
-          <a:xfrm>
-            <a:off x="0" y="0"/>
-            <a:ext cx="12192000" cy="6858000"/>
-          </a:xfrm>
-          <a:prstGeom prst="rect">
-            <a:avLst/>
-          </a:prstGeom>
-        </p:spPr>
-      </p:pic>
-      <p:pic>
-        <p:nvPicPr>
-          <p:cNvPr id="2" name="Рисунок 1">
-            <a:extLst>
-              <a:ext uri="{FF2B5EF4-FFF2-40B4-BE49-F238E27FC236}">
-                <a16:creationId xmlns:a16="http://schemas.microsoft.com/office/drawing/2014/main" id="{6B39BD18-0B88-44A5-5FAA-35732932D46F}"/>
-              </a:ext>
-            </a:extLst>
-          </p:cNvPr>
-          <p:cNvPicPr>
-            <a:picLocks noChangeAspect="1"/>
-          </p:cNvPicPr>
-          <p:nvPr userDrawn="1"/>
-        </p:nvPicPr>
-        <p:blipFill>
-          <a:blip r:embed="rId3" cstate="screen">
-            <a:extLst>
-              <a:ext uri="{28A0092B-C50C-407E-A947-70E740481C1C}">
-                <a14:useLocalDpi xmlns:a14="http://schemas.microsoft.com/office/drawing/2010/main"/>
-              </a:ext>
-            </a:extLst>
-          </a:blip>
-          <a:stretch>
-            <a:fillRect/>
-          </a:stretch>
-        </p:blipFill>
-        <p:spPr bwMode="auto">
-          <a:xfrm>
-            <a:off x="494001" y="303628"/>
-            <a:ext cx="1420524" cy="226197"/>
-          </a:xfrm>
-          <a:prstGeom prst="rect">
-            <a:avLst/>
-          </a:prstGeom>
-        </p:spPr>
-      </p:pic>
     </p:spTree>
     <p:extLst>
       <p:ext uri="{BB962C8B-B14F-4D97-AF65-F5344CB8AC3E}">
-        <p14:creationId xmlns:p14="http://schemas.microsoft.com/office/powerpoint/2010/main" val="664026630"/>
+        <ns3:creationId val="664026630"/>
       </p:ext>
     </p:extLst>
   </p:cSld>
@@ -3214,20 +2171,20 @@
   </p:clrMapOvr>
   <p:extLst>
     <p:ext uri="{DCECCB84-F9BA-43D5-87BE-67443E8EF086}">
-      <p15:sldGuideLst xmlns:p15="http://schemas.microsoft.com/office/powerpoint/2012/main">
-        <p15:guide id="4" orient="horz" pos="278">
-          <p15:clr>
+      <ns4:sldGuideLst>
+        <ns4:guide id="4" orient="horz" pos="278">
+          <ns4:clr>
             <a:srgbClr val="FBAE40"/>
-          </p15:clr>
-        </p15:guide>
-      </p15:sldGuideLst>
+          </ns4:clr>
+        </ns4:guide>
+      </ns4:sldGuideLst>
     </p:ext>
   </p:extLst>
 </p:sldLayout>
 </file>
 
 <file path=ppt/slideLayouts/slideLayout21.xml><?xml version="1.0" encoding="utf-8"?>
-<p:sldLayout xmlns:a="http://schemas.openxmlformats.org/drawingml/2006/main" xmlns:r="http://schemas.openxmlformats.org/officeDocument/2006/relationships" xmlns:p="http://schemas.openxmlformats.org/presentationml/2006/main" userDrawn="1">
+<p:sldLayout xmlns:p="http://schemas.openxmlformats.org/presentationml/2006/main" xmlns:a="http://schemas.openxmlformats.org/drawingml/2006/main" xmlns:ns3="http://schemas.microsoft.com/office/powerpoint/2010/main" xmlns:ns4="http://schemas.microsoft.com/office/powerpoint/2012/main" userDrawn="1">
   <p:cSld name="Дополнительный 9">
     <p:spTree>
       <p:nvGrpSpPr>
@@ -3243,82 +2200,10 @@
           <a:chExt cx="0" cy="0"/>
         </a:xfrm>
       </p:grpSpPr>
-      <p:pic>
-        <p:nvPicPr>
-          <p:cNvPr id="2" name="Рисунок 1">
-            <a:extLst>
-              <a:ext uri="{FF2B5EF4-FFF2-40B4-BE49-F238E27FC236}">
-                <a16:creationId xmlns:a16="http://schemas.microsoft.com/office/drawing/2014/main" id="{B7F17C25-9793-C064-6568-21402FBEAB1F}"/>
-              </a:ext>
-            </a:extLst>
-          </p:cNvPr>
-          <p:cNvPicPr>
-            <a:picLocks noChangeAspect="1"/>
-          </p:cNvPicPr>
-          <p:nvPr userDrawn="1"/>
-        </p:nvPicPr>
-        <p:blipFill>
-          <a:blip r:embed="rId2" cstate="screen">
-            <a:extLst>
-              <a:ext uri="{28A0092B-C50C-407E-A947-70E740481C1C}">
-                <a14:useLocalDpi xmlns:a14="http://schemas.microsoft.com/office/drawing/2010/main"/>
-              </a:ext>
-            </a:extLst>
-          </a:blip>
-          <a:stretch>
-            <a:fillRect/>
-          </a:stretch>
-        </p:blipFill>
-        <p:spPr>
-          <a:xfrm flipV="1">
-            <a:off x="0" y="0"/>
-            <a:ext cx="12192000" cy="6858000"/>
-          </a:xfrm>
-          <a:prstGeom prst="rect">
-            <a:avLst/>
-          </a:prstGeom>
-        </p:spPr>
-      </p:pic>
-      <p:pic>
-        <p:nvPicPr>
-          <p:cNvPr id="3" name="Рисунок 2">
-            <a:extLst>
-              <a:ext uri="{FF2B5EF4-FFF2-40B4-BE49-F238E27FC236}">
-                <a16:creationId xmlns:a16="http://schemas.microsoft.com/office/drawing/2014/main" id="{AF7555FD-EA4A-03D4-5665-7AD8C630694C}"/>
-              </a:ext>
-            </a:extLst>
-          </p:cNvPr>
-          <p:cNvPicPr>
-            <a:picLocks noChangeAspect="1"/>
-          </p:cNvPicPr>
-          <p:nvPr userDrawn="1"/>
-        </p:nvPicPr>
-        <p:blipFill>
-          <a:blip r:embed="rId3" cstate="screen">
-            <a:extLst>
-              <a:ext uri="{28A0092B-C50C-407E-A947-70E740481C1C}">
-                <a14:useLocalDpi xmlns:a14="http://schemas.microsoft.com/office/drawing/2010/main"/>
-              </a:ext>
-            </a:extLst>
-          </a:blip>
-          <a:stretch>
-            <a:fillRect/>
-          </a:stretch>
-        </p:blipFill>
-        <p:spPr bwMode="auto">
-          <a:xfrm>
-            <a:off x="494001" y="303628"/>
-            <a:ext cx="1420524" cy="226197"/>
-          </a:xfrm>
-          <a:prstGeom prst="rect">
-            <a:avLst/>
-          </a:prstGeom>
-        </p:spPr>
-      </p:pic>
     </p:spTree>
     <p:extLst>
       <p:ext uri="{BB962C8B-B14F-4D97-AF65-F5344CB8AC3E}">
-        <p14:creationId xmlns:p14="http://schemas.microsoft.com/office/powerpoint/2010/main" val="2498016944"/>
+        <ns3:creationId val="2498016944"/>
       </p:ext>
     </p:extLst>
   </p:cSld>
@@ -3327,20 +2212,20 @@
   </p:clrMapOvr>
   <p:extLst>
     <p:ext uri="{DCECCB84-F9BA-43D5-87BE-67443E8EF086}">
-      <p15:sldGuideLst xmlns:p15="http://schemas.microsoft.com/office/powerpoint/2012/main">
-        <p15:guide id="4" orient="horz" pos="278">
-          <p15:clr>
+      <ns4:sldGuideLst>
+        <ns4:guide id="4" orient="horz" pos="278">
+          <ns4:clr>
             <a:srgbClr val="FBAE40"/>
-          </p15:clr>
-        </p15:guide>
-      </p15:sldGuideLst>
+          </ns4:clr>
+        </ns4:guide>
+      </ns4:sldGuideLst>
     </p:ext>
   </p:extLst>
 </p:sldLayout>
 </file>
 
 <file path=ppt/slideLayouts/slideLayout3.xml><?xml version="1.0" encoding="utf-8"?>
-<p:sldLayout xmlns:a="http://schemas.openxmlformats.org/drawingml/2006/main" xmlns:r="http://schemas.openxmlformats.org/officeDocument/2006/relationships" xmlns:p="http://schemas.openxmlformats.org/presentationml/2006/main" showMasterPhAnim="0" userDrawn="1">
+<p:sldLayout xmlns:p="http://schemas.openxmlformats.org/presentationml/2006/main" xmlns:a="http://schemas.openxmlformats.org/drawingml/2006/main" xmlns:ns1="http://schemas.microsoft.com/office/drawing/2014/main" xmlns:ns3="http://schemas.microsoft.com/office/powerpoint/2010/main" showMasterPhAnim="0" userDrawn="1">
   <p:cSld name="Титульный 2">
     <p:spTree>
       <p:nvGrpSpPr>
@@ -3356,48 +2241,12 @@
           <a:chExt cx="0" cy="0"/>
         </a:xfrm>
       </p:grpSpPr>
-      <p:pic>
-        <p:nvPicPr>
-          <p:cNvPr id="5" name="Рисунок 4">
-            <a:extLst>
-              <a:ext uri="{FF2B5EF4-FFF2-40B4-BE49-F238E27FC236}">
-                <a16:creationId xmlns:a16="http://schemas.microsoft.com/office/drawing/2014/main" id="{77FDF463-3F7C-D97B-A458-574B23F12B5B}"/>
-              </a:ext>
-            </a:extLst>
-          </p:cNvPr>
-          <p:cNvPicPr>
-            <a:picLocks noChangeAspect="1"/>
-          </p:cNvPicPr>
-          <p:nvPr userDrawn="1"/>
-        </p:nvPicPr>
-        <p:blipFill>
-          <a:blip r:embed="rId2" cstate="screen">
-            <a:extLst>
-              <a:ext uri="{28A0092B-C50C-407E-A947-70E740481C1C}">
-                <a14:useLocalDpi xmlns:a14="http://schemas.microsoft.com/office/drawing/2010/main"/>
-              </a:ext>
-            </a:extLst>
-          </a:blip>
-          <a:stretch>
-            <a:fillRect/>
-          </a:stretch>
-        </p:blipFill>
-        <p:spPr>
-          <a:xfrm>
-            <a:off x="0" y="0"/>
-            <a:ext cx="12192000" cy="6858000"/>
-          </a:xfrm>
-          <a:prstGeom prst="rect">
-            <a:avLst/>
-          </a:prstGeom>
-        </p:spPr>
-      </p:pic>
       <p:sp>
         <p:nvSpPr>
           <p:cNvPr id="3" name="Заголовок 2">
             <a:extLst>
               <a:ext uri="{FF2B5EF4-FFF2-40B4-BE49-F238E27FC236}">
-                <a16:creationId xmlns:a16="http://schemas.microsoft.com/office/drawing/2014/main" id="{B7DE440B-5F4B-F01E-5128-3F49195CE0BE}"/>
+                <ns1:creationId id="{B7DE440B-5F4B-F01E-5128-3F49195CE0BE}"/>
               </a:ext>
             </a:extLst>
           </p:cNvPr>
@@ -3438,107 +2287,15 @@
             <a:pPr marL="0" lvl="0"/>
             <a:r>
               <a:rPr lang="ru-RU" dirty="0"/>
-              <a:t>Образец заголовка</a:t>
+              <a:t/>
             </a:r>
           </a:p>
         </p:txBody>
       </p:sp>
-      <p:sp>
-        <p:nvSpPr>
-          <p:cNvPr id="2" name="Прямоугольник 1">
-            <a:extLst>
-              <a:ext uri="{FF2B5EF4-FFF2-40B4-BE49-F238E27FC236}">
-                <a16:creationId xmlns:a16="http://schemas.microsoft.com/office/drawing/2014/main" id="{45ED4612-4EE8-5736-6015-E89FD98A8C2E}"/>
-              </a:ext>
-            </a:extLst>
-          </p:cNvPr>
-          <p:cNvSpPr/>
-          <p:nvPr userDrawn="1"/>
-        </p:nvSpPr>
-        <p:spPr>
-          <a:xfrm>
-            <a:off x="383177" y="209006"/>
-            <a:ext cx="1663337" cy="435428"/>
-          </a:xfrm>
-          <a:prstGeom prst="rect">
-            <a:avLst/>
-          </a:prstGeom>
-          <a:solidFill>
-            <a:srgbClr val="000000"/>
-          </a:solidFill>
-          <a:ln>
-            <a:noFill/>
-          </a:ln>
-        </p:spPr>
-        <p:style>
-          <a:lnRef idx="2">
-            <a:schemeClr val="accent1">
-              <a:shade val="50000"/>
-            </a:schemeClr>
-          </a:lnRef>
-          <a:fillRef idx="1">
-            <a:schemeClr val="accent1"/>
-          </a:fillRef>
-          <a:effectRef idx="0">
-            <a:schemeClr val="accent1"/>
-          </a:effectRef>
-          <a:fontRef idx="minor">
-            <a:schemeClr val="lt1"/>
-          </a:fontRef>
-        </p:style>
-        <p:txBody>
-          <a:bodyPr rtlCol="0" anchor="ctr"/>
-          <a:lstStyle/>
-          <a:p>
-            <a:pPr algn="ctr"/>
-            <a:endParaRPr lang="ru-RU" dirty="0">
-              <a:solidFill>
-                <a:srgbClr val="000333"/>
-              </a:solidFill>
-            </a:endParaRPr>
-          </a:p>
-        </p:txBody>
-      </p:sp>
-      <p:pic>
-        <p:nvPicPr>
-          <p:cNvPr id="4" name="Рисунок 3">
-            <a:extLst>
-              <a:ext uri="{FF2B5EF4-FFF2-40B4-BE49-F238E27FC236}">
-                <a16:creationId xmlns:a16="http://schemas.microsoft.com/office/drawing/2014/main" id="{A6FDCA23-7B07-BAB9-5C0E-53A2BDC3EA18}"/>
-              </a:ext>
-            </a:extLst>
-          </p:cNvPr>
-          <p:cNvPicPr>
-            <a:picLocks noChangeAspect="1"/>
-          </p:cNvPicPr>
-          <p:nvPr userDrawn="1"/>
-        </p:nvPicPr>
-        <p:blipFill>
-          <a:blip r:embed="rId3" cstate="screen">
-            <a:extLst>
-              <a:ext uri="{28A0092B-C50C-407E-A947-70E740481C1C}">
-                <a14:useLocalDpi xmlns:a14="http://schemas.microsoft.com/office/drawing/2010/main"/>
-              </a:ext>
-            </a:extLst>
-          </a:blip>
-          <a:stretch>
-            <a:fillRect/>
-          </a:stretch>
-        </p:blipFill>
-        <p:spPr bwMode="auto">
-          <a:xfrm>
-            <a:off x="842963" y="703497"/>
-            <a:ext cx="2102102" cy="334728"/>
-          </a:xfrm>
-          <a:prstGeom prst="rect">
-            <a:avLst/>
-          </a:prstGeom>
-        </p:spPr>
-      </p:pic>
     </p:spTree>
     <p:extLst>
       <p:ext uri="{BB962C8B-B14F-4D97-AF65-F5344CB8AC3E}">
-        <p14:creationId xmlns:p14="http://schemas.microsoft.com/office/powerpoint/2010/main" val="1599003026"/>
+        <ns3:creationId val="1599003026"/>
       </p:ext>
     </p:extLst>
   </p:cSld>
@@ -3549,7 +2306,7 @@
 </file>
 
 <file path=ppt/slideLayouts/slideLayout4.xml><?xml version="1.0" encoding="utf-8"?>
-<p:sldLayout xmlns:a="http://schemas.openxmlformats.org/drawingml/2006/main" xmlns:r="http://schemas.openxmlformats.org/officeDocument/2006/relationships" xmlns:p="http://schemas.openxmlformats.org/presentationml/2006/main" showMasterPhAnim="0" userDrawn="1">
+<p:sldLayout xmlns:p="http://schemas.openxmlformats.org/presentationml/2006/main" xmlns:a="http://schemas.openxmlformats.org/drawingml/2006/main" xmlns:ns1="http://schemas.microsoft.com/office/drawing/2014/main" xmlns:ns2="http://schemas.microsoft.com/office/powerpoint/2010/main" xmlns:ns3="http://schemas.microsoft.com/office/powerpoint/2012/main" showMasterPhAnim="0" userDrawn="1">
   <p:cSld name="Разделительный 1">
     <p:spTree>
       <p:nvGrpSpPr>
@@ -3565,48 +2322,12 @@
           <a:chExt cx="0" cy="0"/>
         </a:xfrm>
       </p:grpSpPr>
-      <p:pic>
-        <p:nvPicPr>
-          <p:cNvPr id="6" name="Рисунок 5">
-            <a:extLst>
-              <a:ext uri="{FF2B5EF4-FFF2-40B4-BE49-F238E27FC236}">
-                <a16:creationId xmlns:a16="http://schemas.microsoft.com/office/drawing/2014/main" id="{187A4403-F9F8-C958-F088-D23066C0D76F}"/>
-              </a:ext>
-            </a:extLst>
-          </p:cNvPr>
-          <p:cNvPicPr>
-            <a:picLocks noChangeAspect="1"/>
-          </p:cNvPicPr>
-          <p:nvPr userDrawn="1"/>
-        </p:nvPicPr>
-        <p:blipFill>
-          <a:blip r:embed="rId2" cstate="screen">
-            <a:extLst>
-              <a:ext uri="{28A0092B-C50C-407E-A947-70E740481C1C}">
-                <a14:useLocalDpi xmlns:a14="http://schemas.microsoft.com/office/drawing/2010/main"/>
-              </a:ext>
-            </a:extLst>
-          </a:blip>
-          <a:stretch>
-            <a:fillRect/>
-          </a:stretch>
-        </p:blipFill>
-        <p:spPr>
-          <a:xfrm>
-            <a:off x="0" y="0"/>
-            <a:ext cx="12192000" cy="6858000"/>
-          </a:xfrm>
-          <a:prstGeom prst="rect">
-            <a:avLst/>
-          </a:prstGeom>
-        </p:spPr>
-      </p:pic>
       <p:sp>
         <p:nvSpPr>
           <p:cNvPr id="3" name="Заголовок 2">
             <a:extLst>
               <a:ext uri="{FF2B5EF4-FFF2-40B4-BE49-F238E27FC236}">
-                <a16:creationId xmlns:a16="http://schemas.microsoft.com/office/drawing/2014/main" id="{7A356348-0A1C-19B6-14AD-415C91E5078F}"/>
+                <ns1:creationId id="{7A356348-0A1C-19B6-14AD-415C91E5078F}"/>
               </a:ext>
             </a:extLst>
           </p:cNvPr>
@@ -3647,7 +2368,7 @@
             <a:pPr marL="0" lvl="0"/>
             <a:r>
               <a:rPr lang="ru-RU" dirty="0"/>
-              <a:t>Образец заголовка</a:t>
+              <a:t/>
             </a:r>
           </a:p>
         </p:txBody>
@@ -3655,7 +2376,7 @@
     </p:spTree>
     <p:extLst>
       <p:ext uri="{BB962C8B-B14F-4D97-AF65-F5344CB8AC3E}">
-        <p14:creationId xmlns:p14="http://schemas.microsoft.com/office/powerpoint/2010/main" val="3430411243"/>
+        <ns2:creationId val="3430411243"/>
       </p:ext>
     </p:extLst>
   </p:cSld>
@@ -3664,25 +2385,25 @@
   </p:clrMapOvr>
   <p:extLst>
     <p:ext uri="{DCECCB84-F9BA-43D5-87BE-67443E8EF086}">
-      <p15:sldGuideLst xmlns:p15="http://schemas.microsoft.com/office/powerpoint/2012/main">
-        <p15:guide id="1" orient="horz" pos="2999">
-          <p15:clr>
+      <ns3:sldGuideLst>
+        <ns3:guide id="1" orient="horz" pos="2999">
+          <ns3:clr>
             <a:srgbClr val="FBAE40"/>
-          </p15:clr>
-        </p15:guide>
-        <p15:guide id="2" pos="347">
-          <p15:clr>
+          </ns3:clr>
+        </ns3:guide>
+        <ns3:guide id="2" pos="347">
+          <ns3:clr>
             <a:srgbClr val="FBAE40"/>
-          </p15:clr>
-        </p15:guide>
-      </p15:sldGuideLst>
+          </ns3:clr>
+        </ns3:guide>
+      </ns3:sldGuideLst>
     </p:ext>
   </p:extLst>
 </p:sldLayout>
 </file>
 
 <file path=ppt/slideLayouts/slideLayout5.xml><?xml version="1.0" encoding="utf-8"?>
-<p:sldLayout xmlns:a="http://schemas.openxmlformats.org/drawingml/2006/main" xmlns:r="http://schemas.openxmlformats.org/officeDocument/2006/relationships" xmlns:p="http://schemas.openxmlformats.org/presentationml/2006/main" showMasterPhAnim="0" userDrawn="1">
+<p:sldLayout xmlns:p="http://schemas.openxmlformats.org/presentationml/2006/main" xmlns:a="http://schemas.openxmlformats.org/drawingml/2006/main" xmlns:ns1="http://schemas.microsoft.com/office/drawing/2014/main" xmlns:ns2="http://schemas.microsoft.com/office/powerpoint/2010/main" xmlns:ns3="http://schemas.microsoft.com/office/powerpoint/2012/main" showMasterPhAnim="0" userDrawn="1">
   <p:cSld name="Разделительный 2">
     <p:spTree>
       <p:nvGrpSpPr>
@@ -3698,48 +2419,12 @@
           <a:chExt cx="0" cy="0"/>
         </a:xfrm>
       </p:grpSpPr>
-      <p:pic>
-        <p:nvPicPr>
-          <p:cNvPr id="5" name="Рисунок 4">
-            <a:extLst>
-              <a:ext uri="{FF2B5EF4-FFF2-40B4-BE49-F238E27FC236}">
-                <a16:creationId xmlns:a16="http://schemas.microsoft.com/office/drawing/2014/main" id="{07BE2712-375E-7C3D-FA51-13E4D0FD7E55}"/>
-              </a:ext>
-            </a:extLst>
-          </p:cNvPr>
-          <p:cNvPicPr>
-            <a:picLocks noChangeAspect="1"/>
-          </p:cNvPicPr>
-          <p:nvPr userDrawn="1"/>
-        </p:nvPicPr>
-        <p:blipFill>
-          <a:blip r:embed="rId2" cstate="screen">
-            <a:extLst>
-              <a:ext uri="{28A0092B-C50C-407E-A947-70E740481C1C}">
-                <a14:useLocalDpi xmlns:a14="http://schemas.microsoft.com/office/drawing/2010/main"/>
-              </a:ext>
-            </a:extLst>
-          </a:blip>
-          <a:stretch>
-            <a:fillRect/>
-          </a:stretch>
-        </p:blipFill>
-        <p:spPr>
-          <a:xfrm>
-            <a:off x="0" y="0"/>
-            <a:ext cx="12192000" cy="6858000"/>
-          </a:xfrm>
-          <a:prstGeom prst="rect">
-            <a:avLst/>
-          </a:prstGeom>
-        </p:spPr>
-      </p:pic>
       <p:sp>
         <p:nvSpPr>
           <p:cNvPr id="3" name="Заголовок 2">
             <a:extLst>
               <a:ext uri="{FF2B5EF4-FFF2-40B4-BE49-F238E27FC236}">
-                <a16:creationId xmlns:a16="http://schemas.microsoft.com/office/drawing/2014/main" id="{BB227342-4D3F-71CA-7674-DADB32FB6E48}"/>
+                <ns1:creationId id="{BB227342-4D3F-71CA-7674-DADB32FB6E48}"/>
               </a:ext>
             </a:extLst>
           </p:cNvPr>
@@ -3780,7 +2465,7 @@
             <a:pPr marL="0" lvl="0"/>
             <a:r>
               <a:rPr lang="ru-RU" dirty="0"/>
-              <a:t>Образец заголовка</a:t>
+              <a:t/>
             </a:r>
           </a:p>
         </p:txBody>
@@ -3788,7 +2473,7 @@
     </p:spTree>
     <p:extLst>
       <p:ext uri="{BB962C8B-B14F-4D97-AF65-F5344CB8AC3E}">
-        <p14:creationId xmlns:p14="http://schemas.microsoft.com/office/powerpoint/2010/main" val="823587224"/>
+        <ns2:creationId val="823587224"/>
       </p:ext>
     </p:extLst>
   </p:cSld>
@@ -3797,25 +2482,25 @@
   </p:clrMapOvr>
   <p:extLst>
     <p:ext uri="{DCECCB84-F9BA-43D5-87BE-67443E8EF086}">
-      <p15:sldGuideLst xmlns:p15="http://schemas.microsoft.com/office/powerpoint/2012/main">
-        <p15:guide id="1" orient="horz" pos="2999">
-          <p15:clr>
+      <ns3:sldGuideLst>
+        <ns3:guide id="1" orient="horz" pos="2999">
+          <ns3:clr>
             <a:srgbClr val="FBAE40"/>
-          </p15:clr>
-        </p15:guide>
-        <p15:guide id="2" pos="347">
-          <p15:clr>
+          </ns3:clr>
+        </ns3:guide>
+        <ns3:guide id="2" pos="347">
+          <ns3:clr>
             <a:srgbClr val="FBAE40"/>
-          </p15:clr>
-        </p15:guide>
-      </p15:sldGuideLst>
+          </ns3:clr>
+        </ns3:guide>
+      </ns3:sldGuideLst>
     </p:ext>
   </p:extLst>
 </p:sldLayout>
 </file>
 
 <file path=ppt/slideLayouts/slideLayout6.xml><?xml version="1.0" encoding="utf-8"?>
-<p:sldLayout xmlns:a="http://schemas.openxmlformats.org/drawingml/2006/main" xmlns:r="http://schemas.openxmlformats.org/officeDocument/2006/relationships" xmlns:p="http://schemas.openxmlformats.org/presentationml/2006/main" showMasterPhAnim="0" userDrawn="1">
+<p:sldLayout xmlns:p="http://schemas.openxmlformats.org/presentationml/2006/main" xmlns:a="http://schemas.openxmlformats.org/drawingml/2006/main" xmlns:ns1="http://schemas.microsoft.com/office/drawing/2014/main" xmlns:ns2="http://schemas.microsoft.com/office/powerpoint/2010/main" showMasterPhAnim="0" userDrawn="1">
   <p:cSld name="Разделительный 3">
     <p:spTree>
       <p:nvGrpSpPr>
@@ -3831,48 +2516,12 @@
           <a:chExt cx="0" cy="0"/>
         </a:xfrm>
       </p:grpSpPr>
-      <p:pic>
-        <p:nvPicPr>
-          <p:cNvPr id="4" name="Рисунок 3">
-            <a:extLst>
-              <a:ext uri="{FF2B5EF4-FFF2-40B4-BE49-F238E27FC236}">
-                <a16:creationId xmlns:a16="http://schemas.microsoft.com/office/drawing/2014/main" id="{4DCA0DFA-0C41-64AC-086D-94D9F1C28BAE}"/>
-              </a:ext>
-            </a:extLst>
-          </p:cNvPr>
-          <p:cNvPicPr>
-            <a:picLocks noChangeAspect="1"/>
-          </p:cNvPicPr>
-          <p:nvPr userDrawn="1"/>
-        </p:nvPicPr>
-        <p:blipFill>
-          <a:blip r:embed="rId2" cstate="screen">
-            <a:extLst>
-              <a:ext uri="{28A0092B-C50C-407E-A947-70E740481C1C}">
-                <a14:useLocalDpi xmlns:a14="http://schemas.microsoft.com/office/drawing/2010/main"/>
-              </a:ext>
-            </a:extLst>
-          </a:blip>
-          <a:stretch>
-            <a:fillRect/>
-          </a:stretch>
-        </p:blipFill>
-        <p:spPr>
-          <a:xfrm>
-            <a:off x="0" y="0"/>
-            <a:ext cx="12192000" cy="6858000"/>
-          </a:xfrm>
-          <a:prstGeom prst="rect">
-            <a:avLst/>
-          </a:prstGeom>
-        </p:spPr>
-      </p:pic>
       <p:sp>
         <p:nvSpPr>
           <p:cNvPr id="3" name="Заголовок 2">
             <a:extLst>
               <a:ext uri="{FF2B5EF4-FFF2-40B4-BE49-F238E27FC236}">
-                <a16:creationId xmlns:a16="http://schemas.microsoft.com/office/drawing/2014/main" id="{2DBF219D-C4F8-F89A-59ED-A994C261ED3F}"/>
+                <ns1:creationId id="{2DBF219D-C4F8-F89A-59ED-A994C261ED3F}"/>
               </a:ext>
             </a:extLst>
           </p:cNvPr>
@@ -3913,7 +2562,7 @@
             <a:pPr marL="0" lvl="0"/>
             <a:r>
               <a:rPr lang="ru-RU" dirty="0"/>
-              <a:t>Образец заголовка</a:t>
+              <a:t/>
             </a:r>
           </a:p>
         </p:txBody>
@@ -3921,7 +2570,7 @@
     </p:spTree>
     <p:extLst>
       <p:ext uri="{BB962C8B-B14F-4D97-AF65-F5344CB8AC3E}">
-        <p14:creationId xmlns:p14="http://schemas.microsoft.com/office/powerpoint/2010/main" val="338299496"/>
+        <ns2:creationId val="338299496"/>
       </p:ext>
     </p:extLst>
   </p:cSld>
@@ -3932,7 +2581,7 @@
 </file>
 
 <file path=ppt/slideLayouts/slideLayout7.xml><?xml version="1.0" encoding="utf-8"?>
-<p:sldLayout xmlns:a="http://schemas.openxmlformats.org/drawingml/2006/main" xmlns:r="http://schemas.openxmlformats.org/officeDocument/2006/relationships" xmlns:p="http://schemas.openxmlformats.org/presentationml/2006/main" showMasterPhAnim="0" userDrawn="1">
+<p:sldLayout xmlns:p="http://schemas.openxmlformats.org/presentationml/2006/main" xmlns:a="http://schemas.openxmlformats.org/drawingml/2006/main" xmlns:ns1="http://schemas.microsoft.com/office/drawing/2014/main" xmlns:ns2="http://schemas.microsoft.com/office/powerpoint/2010/main" xmlns:ns3="http://schemas.microsoft.com/office/powerpoint/2012/main" showMasterPhAnim="0" userDrawn="1">
   <p:cSld name="Основной 1">
     <p:spTree>
       <p:nvGrpSpPr>
@@ -3948,48 +2597,12 @@
           <a:chExt cx="0" cy="0"/>
         </a:xfrm>
       </p:grpSpPr>
-      <p:pic>
-        <p:nvPicPr>
-          <p:cNvPr id="3" name="Рисунок 2">
-            <a:extLst>
-              <a:ext uri="{FF2B5EF4-FFF2-40B4-BE49-F238E27FC236}">
-                <a16:creationId xmlns:a16="http://schemas.microsoft.com/office/drawing/2014/main" id="{E03BF728-2896-9B76-20A2-AF2CCD89E3BF}"/>
-              </a:ext>
-            </a:extLst>
-          </p:cNvPr>
-          <p:cNvPicPr>
-            <a:picLocks noChangeAspect="1"/>
-          </p:cNvPicPr>
-          <p:nvPr userDrawn="1"/>
-        </p:nvPicPr>
-        <p:blipFill>
-          <a:blip r:embed="rId2" cstate="screen">
-            <a:extLst>
-              <a:ext uri="{28A0092B-C50C-407E-A947-70E740481C1C}">
-                <a14:useLocalDpi xmlns:a14="http://schemas.microsoft.com/office/drawing/2010/main"/>
-              </a:ext>
-            </a:extLst>
-          </a:blip>
-          <a:stretch>
-            <a:fillRect/>
-          </a:stretch>
-        </p:blipFill>
-        <p:spPr>
-          <a:xfrm>
-            <a:off x="0" y="0"/>
-            <a:ext cx="12192000" cy="6858000"/>
-          </a:xfrm>
-          <a:prstGeom prst="rect">
-            <a:avLst/>
-          </a:prstGeom>
-        </p:spPr>
-      </p:pic>
       <p:sp>
         <p:nvSpPr>
           <p:cNvPr id="7" name="Заголовок 6">
             <a:extLst>
               <a:ext uri="{FF2B5EF4-FFF2-40B4-BE49-F238E27FC236}">
-                <a16:creationId xmlns:a16="http://schemas.microsoft.com/office/drawing/2014/main" id="{B43CF130-F016-AF4E-0B6E-17CDBB8EF85A}"/>
+                <ns1:creationId id="{B43CF130-F016-AF4E-0B6E-17CDBB8EF85A}"/>
               </a:ext>
             </a:extLst>
           </p:cNvPr>
@@ -4030,7 +2643,7 @@
             <a:pPr marL="0" lvl="0"/>
             <a:r>
               <a:rPr lang="ru-RU" dirty="0"/>
-              <a:t>Образец заголовка</a:t>
+              <a:t/>
             </a:r>
           </a:p>
         </p:txBody>
@@ -4040,7 +2653,7 @@
           <p:cNvPr id="10" name="Текст 9">
             <a:extLst>
               <a:ext uri="{FF2B5EF4-FFF2-40B4-BE49-F238E27FC236}">
-                <a16:creationId xmlns:a16="http://schemas.microsoft.com/office/drawing/2014/main" id="{A0C7D55F-2B08-D4A8-64E4-642579E7504C}"/>
+                <ns1:creationId id="{A0C7D55F-2B08-D4A8-64E4-642579E7504C}"/>
               </a:ext>
             </a:extLst>
           </p:cNvPr>
@@ -4081,7 +2694,7 @@
             <a:pPr marL="0" lvl="0"/>
             <a:r>
               <a:rPr lang="ru-RU" dirty="0"/>
-              <a:t>Образец подзаголовка</a:t>
+              <a:t/>
             </a:r>
           </a:p>
         </p:txBody>
@@ -4089,7 +2702,7 @@
     </p:spTree>
     <p:extLst>
       <p:ext uri="{BB962C8B-B14F-4D97-AF65-F5344CB8AC3E}">
-        <p14:creationId xmlns:p14="http://schemas.microsoft.com/office/powerpoint/2010/main" val="3574567455"/>
+        <ns2:creationId val="3574567455"/>
       </p:ext>
     </p:extLst>
   </p:cSld>
@@ -4098,25 +2711,25 @@
   </p:clrMapOvr>
   <p:extLst>
     <p:ext uri="{DCECCB84-F9BA-43D5-87BE-67443E8EF086}">
-      <p15:sldGuideLst xmlns:p15="http://schemas.microsoft.com/office/powerpoint/2012/main">
-        <p15:guide id="1" orient="horz" pos="777">
-          <p15:clr>
+      <ns3:sldGuideLst>
+        <ns3:guide id="1" orient="horz" pos="777">
+          <ns3:clr>
             <a:srgbClr val="FBAE40"/>
-          </p15:clr>
-        </p15:guide>
-        <p15:guide id="2" pos="347">
-          <p15:clr>
+          </ns3:clr>
+        </ns3:guide>
+        <ns3:guide id="2" pos="347">
+          <ns3:clr>
             <a:srgbClr val="FBAE40"/>
-          </p15:clr>
-        </p15:guide>
-      </p15:sldGuideLst>
+          </ns3:clr>
+        </ns3:guide>
+      </ns3:sldGuideLst>
     </p:ext>
   </p:extLst>
 </p:sldLayout>
 </file>
 
 <file path=ppt/slideLayouts/slideLayout8.xml><?xml version="1.0" encoding="utf-8"?>
-<p:sldLayout xmlns:a="http://schemas.openxmlformats.org/drawingml/2006/main" xmlns:r="http://schemas.openxmlformats.org/officeDocument/2006/relationships" xmlns:p="http://schemas.openxmlformats.org/presentationml/2006/main" showMasterPhAnim="0" userDrawn="1">
+<p:sldLayout xmlns:p="http://schemas.openxmlformats.org/presentationml/2006/main" xmlns:a="http://schemas.openxmlformats.org/drawingml/2006/main" xmlns:ns1="http://schemas.microsoft.com/office/powerpoint/2010/main" showMasterPhAnim="0" userDrawn="1">
   <p:cSld name="Основной 2">
     <p:spTree>
       <p:nvGrpSpPr>
@@ -4132,32 +2745,10 @@
           <a:chExt cx="0" cy="0"/>
         </a:xfrm>
       </p:grpSpPr>
-      <p:pic>
-        <p:nvPicPr>
-          <p:cNvPr id="5" name="Рисунок 4"/>
-          <p:cNvPicPr>
-            <a:picLocks noChangeAspect="1"/>
-          </p:cNvPicPr>
-          <p:nvPr userDrawn="1"/>
-        </p:nvPicPr>
-        <p:blipFill>
-          <a:blip r:embed="rId2"/>
-          <a:stretch/>
-        </p:blipFill>
-        <p:spPr bwMode="auto">
-          <a:xfrm>
-            <a:off x="0" y="0"/>
-            <a:ext cx="12192000" cy="6858000"/>
-          </a:xfrm>
-          <a:prstGeom prst="rect">
-            <a:avLst/>
-          </a:prstGeom>
-        </p:spPr>
-      </p:pic>
     </p:spTree>
     <p:extLst>
       <p:ext uri="{BB962C8B-B14F-4D97-AF65-F5344CB8AC3E}">
-        <p14:creationId xmlns:p14="http://schemas.microsoft.com/office/powerpoint/2010/main" val="2903368366"/>
+        <ns1:creationId val="2903368366"/>
       </p:ext>
     </p:extLst>
   </p:cSld>
@@ -4168,7 +2759,7 @@
 </file>
 
 <file path=ppt/slideLayouts/slideLayout9.xml><?xml version="1.0" encoding="utf-8"?>
-<p:sldLayout xmlns:a="http://schemas.openxmlformats.org/drawingml/2006/main" xmlns:r="http://schemas.openxmlformats.org/officeDocument/2006/relationships" xmlns:p="http://schemas.openxmlformats.org/presentationml/2006/main" showMasterPhAnim="0" userDrawn="1">
+<p:sldLayout xmlns:p="http://schemas.openxmlformats.org/presentationml/2006/main" xmlns:a="http://schemas.openxmlformats.org/drawingml/2006/main" xmlns:ns1="http://schemas.microsoft.com/office/drawing/2014/main" xmlns:ns2="http://schemas.microsoft.com/office/powerpoint/2010/main" xmlns:ns3="http://schemas.microsoft.com/office/powerpoint/2012/main" showMasterPhAnim="0" userDrawn="1">
   <p:cSld name="Основной 3">
     <p:spTree>
       <p:nvGrpSpPr>
@@ -4184,49 +2775,12 @@
           <a:chExt cx="0" cy="0"/>
         </a:xfrm>
       </p:grpSpPr>
-      <p:pic>
-        <p:nvPicPr>
-          <p:cNvPr id="3" name="Рисунок 2">
-            <a:extLst>
-              <a:ext uri="{FF2B5EF4-FFF2-40B4-BE49-F238E27FC236}">
-                <a16:creationId xmlns:a16="http://schemas.microsoft.com/office/drawing/2014/main" id="{8B997872-A2C9-C480-1D85-D9A12048FD2B}"/>
-              </a:ext>
-            </a:extLst>
-          </p:cNvPr>
-          <p:cNvPicPr>
-            <a:picLocks noChangeAspect="1"/>
-          </p:cNvPicPr>
-          <p:nvPr userDrawn="1"/>
-        </p:nvPicPr>
-        <p:blipFill>
-          <a:blip r:embed="rId2" cstate="screen">
-            <a:extLst>
-              <a:ext uri="{28A0092B-C50C-407E-A947-70E740481C1C}">
-                <a14:useLocalDpi xmlns:a14="http://schemas.microsoft.com/office/drawing/2010/main"/>
-              </a:ext>
-            </a:extLst>
-          </a:blip>
-          <a:stretch>
-            <a:fillRect/>
-          </a:stretch>
-        </p:blipFill>
-        <p:spPr>
-          <a:xfrm>
-            <a:off x="0" y="0"/>
-            <a:ext cx="12192000" cy="6858000"/>
-          </a:xfrm>
-          <a:prstGeom prst="rect">
-            <a:avLst/>
-          </a:prstGeom>
-          <a:noFill/>
-        </p:spPr>
-      </p:pic>
       <p:sp>
         <p:nvSpPr>
           <p:cNvPr id="2" name="Заголовок 6">
             <a:extLst>
               <a:ext uri="{FF2B5EF4-FFF2-40B4-BE49-F238E27FC236}">
-                <a16:creationId xmlns:a16="http://schemas.microsoft.com/office/drawing/2014/main" id="{76E53CBF-157B-5816-78CF-F148F327C39F}"/>
+                <ns1:creationId id="{76E53CBF-157B-5816-78CF-F148F327C39F}"/>
               </a:ext>
             </a:extLst>
           </p:cNvPr>
@@ -4267,7 +2821,7 @@
             <a:pPr marL="0" lvl="0"/>
             <a:r>
               <a:rPr lang="ru-RU" dirty="0"/>
-              <a:t>Образец заголовка</a:t>
+              <a:t/>
             </a:r>
           </a:p>
         </p:txBody>
@@ -4277,7 +2831,7 @@
           <p:cNvPr id="4" name="Текст 9">
             <a:extLst>
               <a:ext uri="{FF2B5EF4-FFF2-40B4-BE49-F238E27FC236}">
-                <a16:creationId xmlns:a16="http://schemas.microsoft.com/office/drawing/2014/main" id="{871F3D7E-C334-E8B1-B5CF-165FB7AA6E98}"/>
+                <ns1:creationId id="{871F3D7E-C334-E8B1-B5CF-165FB7AA6E98}"/>
               </a:ext>
             </a:extLst>
           </p:cNvPr>
@@ -4318,7 +2872,7 @@
             <a:pPr marL="0" lvl="0"/>
             <a:r>
               <a:rPr lang="ru-RU" dirty="0"/>
-              <a:t>Образец подзаголовка</a:t>
+              <a:t/>
             </a:r>
           </a:p>
         </p:txBody>
@@ -4326,7 +2880,7 @@
     </p:spTree>
     <p:extLst>
       <p:ext uri="{BB962C8B-B14F-4D97-AF65-F5344CB8AC3E}">
-        <p14:creationId xmlns:p14="http://schemas.microsoft.com/office/powerpoint/2010/main" val="3047054255"/>
+        <ns2:creationId val="3047054255"/>
       </p:ext>
     </p:extLst>
   </p:cSld>
@@ -4335,25 +2889,25 @@
   </p:clrMapOvr>
   <p:extLst>
     <p:ext uri="{DCECCB84-F9BA-43D5-87BE-67443E8EF086}">
-      <p15:sldGuideLst xmlns:p15="http://schemas.microsoft.com/office/powerpoint/2012/main">
-        <p15:guide id="1" orient="horz" pos="777" userDrawn="1">
-          <p15:clr>
+      <ns3:sldGuideLst>
+        <ns3:guide id="1" orient="horz" pos="777" userDrawn="1">
+          <ns3:clr>
             <a:srgbClr val="FBAE40"/>
-          </p15:clr>
-        </p15:guide>
-        <p15:guide id="2" pos="347" userDrawn="1">
-          <p15:clr>
+          </ns3:clr>
+        </ns3:guide>
+        <ns3:guide id="2" pos="347" userDrawn="1">
+          <ns3:clr>
             <a:srgbClr val="FBAE40"/>
-          </p15:clr>
-        </p15:guide>
-      </p15:sldGuideLst>
+          </ns3:clr>
+        </ns3:guide>
+      </ns3:sldGuideLst>
     </p:ext>
   </p:extLst>
 </p:sldLayout>
 </file>
 
 <file path=ppt/slideMasters/slideMaster1.xml><?xml version="1.0" encoding="utf-8"?>
-<p:sldMaster xmlns:a="http://schemas.openxmlformats.org/drawingml/2006/main" xmlns:r="http://schemas.openxmlformats.org/officeDocument/2006/relationships" xmlns:p="http://schemas.openxmlformats.org/presentationml/2006/main">
+<p:sldMaster xmlns:p="http://schemas.openxmlformats.org/presentationml/2006/main" xmlns:a="http://schemas.openxmlformats.org/drawingml/2006/main" xmlns:ns1="http://schemas.microsoft.com/office/drawing/2014/main" xmlns:ns2="http://schemas.microsoft.com/office/powerpoint/2010/main" xmlns:r="http://schemas.openxmlformats.org/officeDocument/2006/relationships" xmlns:ns3="http://schemas.microsoft.com/office/powerpoint/2012/main">
   <p:cSld>
     <p:bg>
       <p:bgPr>
@@ -4407,35 +2961,35 @@
             </a:pPr>
             <a:r>
               <a:rPr lang="ru-RU" dirty="0"/>
-              <a:t>Образец текста</a:t>
+              <a:t/>
             </a:r>
           </a:p>
           <a:p>
             <a:pPr lvl="1"/>
             <a:r>
               <a:rPr lang="ru-RU" dirty="0"/>
-              <a:t>Второй уровень</a:t>
+              <a:t/>
             </a:r>
           </a:p>
           <a:p>
             <a:pPr lvl="2"/>
             <a:r>
               <a:rPr lang="ru-RU" dirty="0"/>
-              <a:t>Третий уровень</a:t>
+              <a:t/>
             </a:r>
           </a:p>
           <a:p>
             <a:pPr lvl="3"/>
             <a:r>
               <a:rPr lang="ru-RU" dirty="0"/>
-              <a:t>Четвертый уровень</a:t>
+              <a:t/>
             </a:r>
           </a:p>
           <a:p>
             <a:pPr lvl="4"/>
             <a:r>
               <a:rPr lang="ru-RU" dirty="0"/>
-              <a:t>Пятый уровень</a:t>
+              <a:t/>
             </a:r>
           </a:p>
         </p:txBody>
@@ -4511,7 +3065,7 @@
             <a:fld id="{8694583C-1372-4011-817E-52B3A6677622}" type="slidenum">
               <a:rPr lang="ru-RU" smtClean="0"/>
               <a:pPr/>
-              <a:t>‹#›</a:t>
+              <a:t/>
             </a:fld>
             <a:endParaRPr lang="ru-RU" dirty="0"/>
           </a:p>
@@ -4522,7 +3076,7 @@
           <p:cNvPr id="7" name="Заголовок 6">
             <a:extLst>
               <a:ext uri="{FF2B5EF4-FFF2-40B4-BE49-F238E27FC236}">
-                <a16:creationId xmlns:a16="http://schemas.microsoft.com/office/drawing/2014/main" id="{B1C2664D-8DF7-4F4B-8903-2EB46930D6A3}"/>
+                <ns1:creationId id="{B1C2664D-8DF7-4F4B-8903-2EB46930D6A3}"/>
               </a:ext>
             </a:extLst>
           </p:cNvPr>
@@ -4550,7 +3104,7 @@
           <a:p>
             <a:r>
               <a:rPr lang="ru-RU" dirty="0"/>
-              <a:t>Образец заголовка</a:t>
+              <a:t/>
             </a:r>
           </a:p>
         </p:txBody>
@@ -4558,7 +3112,7 @@
     </p:spTree>
     <p:extLst>
       <p:ext uri="{BB962C8B-B14F-4D97-AF65-F5344CB8AC3E}">
-        <p14:creationId xmlns:p14="http://schemas.microsoft.com/office/powerpoint/2010/main" val="1606985755"/>
+        <ns2:creationId val="1606985755"/>
       </p:ext>
     </p:extLst>
   </p:cSld>
@@ -4868,15 +3422,26 @@
   </p:txStyles>
   <p:extLst>
     <p:ext uri="{27BBF7A9-308A-43DC-89C8-2F10F3537804}">
-      <p15:sldGuideLst xmlns:p15="http://schemas.microsoft.com/office/powerpoint/2012/main"/>
+      <ns3:sldGuideLst/>
     </p:ext>
   </p:extLst>
 </p:sldMaster>
 </file>
 
 <file path=ppt/slides/slide57.xml><?xml version="1.0" encoding="utf-8"?>
-<p:sld xmlns:a="http://schemas.openxmlformats.org/drawingml/2006/main" xmlns:p="http://schemas.openxmlformats.org/presentationml/2006/main" xmlns:r="http://schemas.openxmlformats.org/officeDocument/2006/relationships">
+<p:sld xmlns:p="http://schemas.openxmlformats.org/presentationml/2006/main" xmlns:a="http://schemas.openxmlformats.org/drawingml/2006/main" xmlns:r="http://schemas.openxmlformats.org/officeDocument/2006/relationships">
   <p:cSld>
+    <p:bg>
+      <p:bgPr>
+        <a:blipFill>
+          <a:blip r:embed="rId2"/>
+          <a:stretch>
+            <a:fillRect/>
+          </a:stretch>
+        </a:blipFill>
+        <a:effectLst/>
+      </p:bgPr>
+    </p:bg>
     <p:spTree>
       <p:nvGrpSpPr>
         <p:cNvPr id="1" name=""/>
@@ -4901,7 +3466,7 @@
           <a:noFill/>
         </p:spPr>
         <p:txBody>
-          <a:bodyPr wrap="square" lIns="0" rIns="0" tIns="0" bIns="0">
+          <a:bodyPr wrap="square" lIns="0" tIns="0" rIns="0" bIns="0">
             <a:spAutoFit/>
           </a:bodyPr>
           <a:lstStyle/>
@@ -4927,7 +3492,7 @@
 </file>
 
 <file path=ppt/theme/theme1.xml><?xml version="1.0" encoding="utf-8"?>
-<a:theme xmlns:a="http://schemas.openxmlformats.org/drawingml/2006/main" name="Тема1">
+<a:theme xmlns:a="http://schemas.openxmlformats.org/drawingml/2006/main" xmlns:ns1="http://schemas.microsoft.com/office/thememl/2012/main" name="Тема1">
   <a:themeElements>
     <a:clrScheme name="Пользовательские 1">
       <a:dk1>
@@ -5172,14 +3737,14 @@
   <a:extraClrSchemeLst/>
   <a:extLst>
     <a:ext uri="{05A4C25C-085E-4340-85A3-A5531E510DB2}">
-      <thm15:themeFamily xmlns:thm15="http://schemas.microsoft.com/office/thememl/2012/main" name="Тема1" id="{AEBB4066-2AF6-BD49-BAE5-218522F2F220}" vid="{77E27D13-7DCD-D443-A851-4441555DB502}"/>
+      <ns1:themeFamily name="Тема1" id="{AEBB4066-2AF6-BD49-BAE5-218522F2F220}" vid="{77E27D13-7DCD-D443-A851-4441555DB502}"/>
     </a:ext>
   </a:extLst>
 </a:theme>
 </file>
 
 <file path=ppt/theme/theme2.xml><?xml version="1.0" encoding="utf-8"?>
-<a:theme xmlns:a="http://schemas.openxmlformats.org/drawingml/2006/main" name="Тема Office">
+<a:theme xmlns:a="http://schemas.openxmlformats.org/drawingml/2006/main" xmlns:ns1="http://schemas.microsoft.com/office/thememl/2012/main" name="Тема Office">
   <a:themeElements>
     <a:clrScheme name="Стандартная">
       <a:dk1>
@@ -5467,14 +4032,14 @@
   <a:extraClrSchemeLst/>
   <a:extLst>
     <a:ext uri="{05A4C25C-085E-4340-85A3-A5531E510DB2}">
-      <thm15:themeFamily xmlns:thm15="http://schemas.microsoft.com/office/thememl/2012/main" name="Office Theme" id="{62F939B6-93AF-4DB8-9C6B-D6C7DFDC589F}" vid="{4A3C46E8-61CC-4603-A589-7422A47A8E4A}"/>
+      <ns1:themeFamily name="Office Theme" id="{62F939B6-93AF-4DB8-9C6B-D6C7DFDC589F}" vid="{4A3C46E8-61CC-4603-A589-7422A47A8E4A}"/>
     </a:ext>
   </a:extLst>
 </a:theme>
 </file>
 
 <file path=ppt/theme/theme3.xml><?xml version="1.0" encoding="utf-8"?>
-<a:theme xmlns:a="http://schemas.openxmlformats.org/drawingml/2006/main" name="Тема Office">
+<a:theme xmlns:a="http://schemas.openxmlformats.org/drawingml/2006/main" xmlns:ns1="http://schemas.microsoft.com/office/thememl/2012/main" name="Тема Office">
   <a:themeElements>
     <a:clrScheme name="Стандартная">
       <a:dk1>
@@ -5762,7 +4327,7 @@
   <a:extraClrSchemeLst/>
   <a:extLst>
     <a:ext uri="{05A4C25C-085E-4340-85A3-A5531E510DB2}">
-      <thm15:themeFamily xmlns:thm15="http://schemas.microsoft.com/office/thememl/2012/main" name="Office Theme" id="{62F939B6-93AF-4DB8-9C6B-D6C7DFDC589F}" vid="{4A3C46E8-61CC-4603-A589-7422A47A8E4A}"/>
+      <ns1:themeFamily name="Office Theme" id="{62F939B6-93AF-4DB8-9C6B-D6C7DFDC589F}" vid="{4A3C46E8-61CC-4603-A589-7422A47A8E4A}"/>
     </a:ext>
   </a:extLst>
 </a:theme>
